--- a/slides-pptx/01-Python_intro_overview.pptx
+++ b/slides-pptx/01-Python_intro_overview.pptx
@@ -5,10 +5,10 @@
     <p:sldMasterId id="2147483648" r:id="rId1"/>
   </p:sldMasterIdLst>
   <p:notesMasterIdLst>
-    <p:notesMasterId r:id="rId45"/>
+    <p:notesMasterId r:id="rId46"/>
   </p:notesMasterIdLst>
   <p:handoutMasterIdLst>
-    <p:handoutMasterId r:id="rId46"/>
+    <p:handoutMasterId r:id="rId47"/>
   </p:handoutMasterIdLst>
   <p:sldIdLst>
     <p:sldId id="262" r:id="rId2"/>
@@ -24,36 +24,37 @@
     <p:sldId id="261" r:id="rId12"/>
     <p:sldId id="263" r:id="rId13"/>
     <p:sldId id="826" r:id="rId14"/>
-    <p:sldId id="641" r:id="rId15"/>
-    <p:sldId id="821" r:id="rId16"/>
-    <p:sldId id="645" r:id="rId17"/>
-    <p:sldId id="646" r:id="rId18"/>
-    <p:sldId id="649" r:id="rId19"/>
-    <p:sldId id="474" r:id="rId20"/>
-    <p:sldId id="470" r:id="rId21"/>
-    <p:sldId id="513" r:id="rId22"/>
-    <p:sldId id="472" r:id="rId23"/>
-    <p:sldId id="471" r:id="rId24"/>
-    <p:sldId id="327" r:id="rId25"/>
-    <p:sldId id="330" r:id="rId26"/>
-    <p:sldId id="473" r:id="rId27"/>
-    <p:sldId id="466" r:id="rId28"/>
-    <p:sldId id="827" r:id="rId29"/>
-    <p:sldId id="357" r:id="rId30"/>
-    <p:sldId id="440" r:id="rId31"/>
-    <p:sldId id="299" r:id="rId32"/>
-    <p:sldId id="465" r:id="rId33"/>
-    <p:sldId id="422" r:id="rId34"/>
-    <p:sldId id="460" r:id="rId35"/>
-    <p:sldId id="512" r:id="rId36"/>
-    <p:sldId id="437" r:id="rId37"/>
-    <p:sldId id="338" r:id="rId38"/>
-    <p:sldId id="438" r:id="rId39"/>
-    <p:sldId id="828" r:id="rId40"/>
-    <p:sldId id="829" r:id="rId41"/>
-    <p:sldId id="279" r:id="rId42"/>
-    <p:sldId id="457" r:id="rId43"/>
-    <p:sldId id="453" r:id="rId44"/>
+    <p:sldId id="830" r:id="rId15"/>
+    <p:sldId id="641" r:id="rId16"/>
+    <p:sldId id="821" r:id="rId17"/>
+    <p:sldId id="645" r:id="rId18"/>
+    <p:sldId id="646" r:id="rId19"/>
+    <p:sldId id="649" r:id="rId20"/>
+    <p:sldId id="474" r:id="rId21"/>
+    <p:sldId id="470" r:id="rId22"/>
+    <p:sldId id="513" r:id="rId23"/>
+    <p:sldId id="472" r:id="rId24"/>
+    <p:sldId id="471" r:id="rId25"/>
+    <p:sldId id="327" r:id="rId26"/>
+    <p:sldId id="330" r:id="rId27"/>
+    <p:sldId id="473" r:id="rId28"/>
+    <p:sldId id="466" r:id="rId29"/>
+    <p:sldId id="827" r:id="rId30"/>
+    <p:sldId id="357" r:id="rId31"/>
+    <p:sldId id="440" r:id="rId32"/>
+    <p:sldId id="299" r:id="rId33"/>
+    <p:sldId id="465" r:id="rId34"/>
+    <p:sldId id="422" r:id="rId35"/>
+    <p:sldId id="460" r:id="rId36"/>
+    <p:sldId id="512" r:id="rId37"/>
+    <p:sldId id="437" r:id="rId38"/>
+    <p:sldId id="338" r:id="rId39"/>
+    <p:sldId id="438" r:id="rId40"/>
+    <p:sldId id="828" r:id="rId41"/>
+    <p:sldId id="829" r:id="rId42"/>
+    <p:sldId id="279" r:id="rId43"/>
+    <p:sldId id="457" r:id="rId44"/>
+    <p:sldId id="453" r:id="rId45"/>
   </p:sldIdLst>
   <p:sldSz cx="12192000" cy="6858000"/>
   <p:notesSz cx="6797675" cy="9928225"/>
@@ -174,6 +175,7 @@
             <p14:sldId id="261"/>
             <p14:sldId id="263"/>
             <p14:sldId id="826"/>
+            <p14:sldId id="830"/>
           </p14:sldIdLst>
         </p14:section>
         <p14:section name="global overview" id="{A47B973D-8192-4585-9723-D73D2CE177B8}">
@@ -630,6 +632,29 @@
     </pc:docChg>
   </pc:docChgLst>
   <pc:docChgLst>
+    <pc:chgData name="Frank Van Puyvelde" userId="ba4190df-4674-45fe-be59-1502c3515486" providerId="ADAL" clId="{46A49013-7A0F-4944-916D-823DEEF8AD41}"/>
+    <pc:docChg chg="custSel modSld">
+      <pc:chgData name="Frank Van Puyvelde" userId="ba4190df-4674-45fe-be59-1502c3515486" providerId="ADAL" clId="{46A49013-7A0F-4944-916D-823DEEF8AD41}" dt="2023-02-07T10:51:36.518" v="6" actId="15"/>
+      <pc:docMkLst>
+        <pc:docMk/>
+      </pc:docMkLst>
+      <pc:sldChg chg="modSp mod">
+        <pc:chgData name="Frank Van Puyvelde" userId="ba4190df-4674-45fe-be59-1502c3515486" providerId="ADAL" clId="{46A49013-7A0F-4944-916D-823DEEF8AD41}" dt="2023-02-07T10:51:36.518" v="6" actId="15"/>
+        <pc:sldMkLst>
+          <pc:docMk/>
+          <pc:sldMk cId="3778624420" sldId="259"/>
+        </pc:sldMkLst>
+      </pc:sldChg>
+      <pc:sldChg chg="modSp mod modAnim">
+        <pc:chgData name="Frank Van Puyvelde" userId="ba4190df-4674-45fe-be59-1502c3515486" providerId="ADAL" clId="{46A49013-7A0F-4944-916D-823DEEF8AD41}" dt="2023-02-07T10:50:41.762" v="5" actId="27636"/>
+        <pc:sldMkLst>
+          <pc:docMk/>
+          <pc:sldMk cId="1360806744" sldId="497"/>
+        </pc:sldMkLst>
+      </pc:sldChg>
+    </pc:docChg>
+  </pc:docChgLst>
+  <pc:docChgLst>
     <pc:chgData name="Frank Van Puyvelde" userId="ba4190df-4674-45fe-be59-1502c3515486" providerId="ADAL" clId="{7F80BC0D-5411-433C-A6D2-DD5325DF1403}"/>
     <pc:docChg chg="undo custSel modSld">
       <pc:chgData name="Frank Van Puyvelde" userId="ba4190df-4674-45fe-be59-1502c3515486" providerId="ADAL" clId="{7F80BC0D-5411-433C-A6D2-DD5325DF1403}" dt="2024-06-25T09:22:05.349" v="283" actId="20577"/>
@@ -648,29 +673,6 @@
         <pc:sldMkLst>
           <pc:docMk/>
           <pc:sldMk cId="2137659803" sldId="824"/>
-        </pc:sldMkLst>
-      </pc:sldChg>
-    </pc:docChg>
-  </pc:docChgLst>
-  <pc:docChgLst>
-    <pc:chgData name="Frank Van Puyvelde" userId="ba4190df-4674-45fe-be59-1502c3515486" providerId="ADAL" clId="{46A49013-7A0F-4944-916D-823DEEF8AD41}"/>
-    <pc:docChg chg="custSel modSld">
-      <pc:chgData name="Frank Van Puyvelde" userId="ba4190df-4674-45fe-be59-1502c3515486" providerId="ADAL" clId="{46A49013-7A0F-4944-916D-823DEEF8AD41}" dt="2023-02-07T10:51:36.518" v="6" actId="15"/>
-      <pc:docMkLst>
-        <pc:docMk/>
-      </pc:docMkLst>
-      <pc:sldChg chg="modSp mod">
-        <pc:chgData name="Frank Van Puyvelde" userId="ba4190df-4674-45fe-be59-1502c3515486" providerId="ADAL" clId="{46A49013-7A0F-4944-916D-823DEEF8AD41}" dt="2023-02-07T10:51:36.518" v="6" actId="15"/>
-        <pc:sldMkLst>
-          <pc:docMk/>
-          <pc:sldMk cId="3778624420" sldId="259"/>
-        </pc:sldMkLst>
-      </pc:sldChg>
-      <pc:sldChg chg="modSp mod modAnim">
-        <pc:chgData name="Frank Van Puyvelde" userId="ba4190df-4674-45fe-be59-1502c3515486" providerId="ADAL" clId="{46A49013-7A0F-4944-916D-823DEEF8AD41}" dt="2023-02-07T10:50:41.762" v="5" actId="27636"/>
-        <pc:sldMkLst>
-          <pc:docMk/>
-          <pc:sldMk cId="1360806744" sldId="497"/>
         </pc:sldMkLst>
       </pc:sldChg>
     </pc:docChg>
@@ -750,22 +752,6 @@
     </pc:docChg>
   </pc:docChgLst>
   <pc:docChgLst>
-    <pc:chgData name="Frank Van Puyvelde" userId="ba4190df-4674-45fe-be59-1502c3515486" providerId="ADAL" clId="{C650EDCE-629E-4C52-868E-EFBC5D8EFBCE}"/>
-    <pc:docChg chg="custSel addSld modSld modSection">
-      <pc:chgData name="Frank Van Puyvelde" userId="ba4190df-4674-45fe-be59-1502c3515486" providerId="ADAL" clId="{C650EDCE-629E-4C52-868E-EFBC5D8EFBCE}" dt="2024-05-24T13:57:34.865" v="465" actId="113"/>
-      <pc:docMkLst>
-        <pc:docMk/>
-      </pc:docMkLst>
-      <pc:sldChg chg="addSp delSp modSp new mod modClrScheme chgLayout">
-        <pc:chgData name="Frank Van Puyvelde" userId="ba4190df-4674-45fe-be59-1502c3515486" providerId="ADAL" clId="{C650EDCE-629E-4C52-868E-EFBC5D8EFBCE}" dt="2024-05-24T13:57:34.865" v="465" actId="113"/>
-        <pc:sldMkLst>
-          <pc:docMk/>
-          <pc:sldMk cId="2137659803" sldId="824"/>
-        </pc:sldMkLst>
-      </pc:sldChg>
-    </pc:docChg>
-  </pc:docChgLst>
-  <pc:docChgLst>
     <pc:chgData name="Frank Van Puyvelde" userId="ba4190df-4674-45fe-be59-1502c3515486" providerId="ADAL" clId="{6F65F12E-AA89-40A4-9666-EBF914E60322}"/>
     <pc:docChg chg="custSel addSld delSld modSld modSection">
       <pc:chgData name="Frank Van Puyvelde" userId="ba4190df-4674-45fe-be59-1502c3515486" providerId="ADAL" clId="{6F65F12E-AA89-40A4-9666-EBF914E60322}" dt="2024-01-22T14:46:20.625" v="348" actId="20577"/>
@@ -809,11 +795,27 @@
       </pc:sldChg>
     </pc:docChg>
   </pc:docChgLst>
+  <pc:docChgLst>
+    <pc:chgData name="Frank Van Puyvelde" userId="ba4190df-4674-45fe-be59-1502c3515486" providerId="ADAL" clId="{C650EDCE-629E-4C52-868E-EFBC5D8EFBCE}"/>
+    <pc:docChg chg="custSel addSld modSld modSection">
+      <pc:chgData name="Frank Van Puyvelde" userId="ba4190df-4674-45fe-be59-1502c3515486" providerId="ADAL" clId="{C650EDCE-629E-4C52-868E-EFBC5D8EFBCE}" dt="2024-05-24T13:57:34.865" v="465" actId="113"/>
+      <pc:docMkLst>
+        <pc:docMk/>
+      </pc:docMkLst>
+      <pc:sldChg chg="addSp delSp modSp new mod modClrScheme chgLayout">
+        <pc:chgData name="Frank Van Puyvelde" userId="ba4190df-4674-45fe-be59-1502c3515486" providerId="ADAL" clId="{C650EDCE-629E-4C52-868E-EFBC5D8EFBCE}" dt="2024-05-24T13:57:34.865" v="465" actId="113"/>
+        <pc:sldMkLst>
+          <pc:docMk/>
+          <pc:sldMk cId="2137659803" sldId="824"/>
+        </pc:sldMkLst>
+      </pc:sldChg>
+    </pc:docChg>
+  </pc:docChgLst>
 </pc:chgInfo>
 </file>
 
 <file path=ppt/diagrams/colors1.xml><?xml version="1.0" encoding="utf-8"?>
-<dgm:colorsDef xmlns:dgm="http://schemas.openxmlformats.org/drawingml/2006/diagram" xmlns:a="http://schemas.openxmlformats.org/drawingml/2006/main" uniqueId="urn:microsoft.com/office/officeart/2005/8/colors/accent1_2">
+<dgm:colorsDef xmlns:dgm="http://schemas.openxmlformats.org/drawingml/2006/diagram" xmlns:a="http://schemas.openxmlformats.org/drawingml/2006/main" uniqueId="urn:microsoft.com/office/officeart/2005/8/colors/accent1_2#1">
   <dgm:title val=""/>
   <dgm:desc val=""/>
   <dgm:catLst>
@@ -1560,7 +1562,7 @@
 </file>
 
 <file path=ppt/diagrams/colors2.xml><?xml version="1.0" encoding="utf-8"?>
-<dgm:colorsDef xmlns:dgm="http://schemas.openxmlformats.org/drawingml/2006/diagram" xmlns:a="http://schemas.openxmlformats.org/drawingml/2006/main" uniqueId="urn:microsoft.com/office/officeart/2005/8/colors/accent1_2">
+<dgm:colorsDef xmlns:dgm="http://schemas.openxmlformats.org/drawingml/2006/diagram" xmlns:a="http://schemas.openxmlformats.org/drawingml/2006/main" uniqueId="urn:microsoft.com/office/officeart/2005/8/colors/accent1_2#2">
   <dgm:title val=""/>
   <dgm:desc val=""/>
   <dgm:catLst>
@@ -2310,7 +2312,7 @@
 <dgm:dataModel xmlns:dgm="http://schemas.openxmlformats.org/drawingml/2006/diagram" xmlns:a="http://schemas.openxmlformats.org/drawingml/2006/main">
   <dgm:ptLst>
     <dgm:pt modelId="{DFC4A2B8-D259-48AD-A41F-D692C8CC6558}" type="doc">
-      <dgm:prSet loTypeId="urn:microsoft.com/office/officeart/2008/layout/HorizontalMultiLevelHierarchy" loCatId="hierarchy" qsTypeId="urn:microsoft.com/office/officeart/2005/8/quickstyle/simple1" qsCatId="simple" csTypeId="urn:microsoft.com/office/officeart/2005/8/colors/accent1_2" csCatId="accent1" phldr="1"/>
+      <dgm:prSet loTypeId="urn:microsoft.com/office/officeart/2008/layout/HorizontalMultiLevelHierarchy" loCatId="hierarchy" qsTypeId="urn:microsoft.com/office/officeart/2005/8/quickstyle/simple1#1" qsCatId="simple" csTypeId="urn:microsoft.com/office/officeart/2005/8/colors/accent1_2#1" csCatId="accent1" phldr="1"/>
       <dgm:spPr/>
       <dgm:t>
         <a:bodyPr/>
@@ -3384,7 +3386,7 @@
 <dgm:dataModel xmlns:dgm="http://schemas.openxmlformats.org/drawingml/2006/diagram" xmlns:a="http://schemas.openxmlformats.org/drawingml/2006/main">
   <dgm:ptLst>
     <dgm:pt modelId="{7C930E86-0C85-408D-BE48-E51E217ED040}" type="doc">
-      <dgm:prSet loTypeId="urn:microsoft.com/office/officeart/2005/8/layout/chevron2" loCatId="process" qsTypeId="urn:microsoft.com/office/officeart/2005/8/quickstyle/simple1" qsCatId="simple" csTypeId="urn:microsoft.com/office/officeart/2005/8/colors/accent1_2" csCatId="accent1" phldr="1"/>
+      <dgm:prSet loTypeId="urn:microsoft.com/office/officeart/2005/8/layout/chevron2" loCatId="process" qsTypeId="urn:microsoft.com/office/officeart/2005/8/quickstyle/simple1#2" qsCatId="simple" csTypeId="urn:microsoft.com/office/officeart/2005/8/colors/accent1_2#2" csCatId="accent1" phldr="1"/>
       <dgm:spPr/>
       <dgm:t>
         <a:bodyPr/>
@@ -7302,7 +7304,7 @@
 </file>
 
 <file path=ppt/diagrams/quickStyle1.xml><?xml version="1.0" encoding="utf-8"?>
-<dgm:styleDef xmlns:dgm="http://schemas.openxmlformats.org/drawingml/2006/diagram" xmlns:a="http://schemas.openxmlformats.org/drawingml/2006/main" uniqueId="urn:microsoft.com/office/officeart/2005/8/quickstyle/simple1">
+<dgm:styleDef xmlns:dgm="http://schemas.openxmlformats.org/drawingml/2006/diagram" xmlns:a="http://schemas.openxmlformats.org/drawingml/2006/main" uniqueId="urn:microsoft.com/office/officeart/2005/8/quickstyle/simple1#1">
   <dgm:title val=""/>
   <dgm:desc val=""/>
   <dgm:catLst>
@@ -8336,7 +8338,7 @@
 </file>
 
 <file path=ppt/diagrams/quickStyle2.xml><?xml version="1.0" encoding="utf-8"?>
-<dgm:styleDef xmlns:dgm="http://schemas.openxmlformats.org/drawingml/2006/diagram" xmlns:a="http://schemas.openxmlformats.org/drawingml/2006/main" uniqueId="urn:microsoft.com/office/officeart/2005/8/quickstyle/simple1">
+<dgm:styleDef xmlns:dgm="http://schemas.openxmlformats.org/drawingml/2006/diagram" xmlns:a="http://schemas.openxmlformats.org/drawingml/2006/main" uniqueId="urn:microsoft.com/office/officeart/2005/8/quickstyle/simple1#2">
   <dgm:title val=""/>
   <dgm:desc val=""/>
   <dgm:catLst>
@@ -9484,7 +9486,7 @@
           <a:p>
             <a:fld id="{7C0C32E9-7654-402D-8E29-870B0AFB287F}" type="datetimeFigureOut">
               <a:rPr lang="nl-BE" smtClean="0"/>
-              <a:t>12/10/2025</a:t>
+              <a:t>1/10/2026</a:t>
             </a:fld>
             <a:endParaRPr lang="nl-BE"/>
           </a:p>
@@ -9910,7 +9912,7 @@
     </p:spTree>
     <p:extLst>
       <p:ext uri="{BB962C8B-B14F-4D97-AF65-F5344CB8AC3E}">
-        <p14:creationId xmlns:p14="http://schemas.microsoft.com/office/powerpoint/2010/main" val="3051675996"/>
+        <p14:creationId xmlns:p14="http://schemas.microsoft.com/office/powerpoint/2010/main" val="2498757725"/>
       </p:ext>
     </p:extLst>
   </p:cSld>
@@ -9964,10 +9966,7 @@
           <a:bodyPr/>
           <a:lstStyle/>
           <a:p>
-            <a:r>
-              <a:rPr lang="nl-BE"/>
-              <a:t>https://alan-turing-institute.github.io/rsd-engineeringcourse/</a:t>
-            </a:r>
+            <a:endParaRPr lang="nl-BE" dirty="0"/>
           </a:p>
         </p:txBody>
       </p:sp>
@@ -9988,7 +9987,94 @@
           <a:p>
             <a:fld id="{4D40F272-7F92-4FF0-959A-28E623229BE1}" type="slidenum">
               <a:rPr lang="nl-BE" smtClean="0"/>
-              <a:t>33</a:t>
+              <a:t>29</a:t>
+            </a:fld>
+            <a:endParaRPr lang="nl-BE"/>
+          </a:p>
+        </p:txBody>
+      </p:sp>
+    </p:spTree>
+    <p:extLst>
+      <p:ext uri="{BB962C8B-B14F-4D97-AF65-F5344CB8AC3E}">
+        <p14:creationId xmlns:p14="http://schemas.microsoft.com/office/powerpoint/2010/main" val="3051675996"/>
+      </p:ext>
+    </p:extLst>
+  </p:cSld>
+  <p:clrMapOvr>
+    <a:masterClrMapping/>
+  </p:clrMapOvr>
+</p:notes>
+</file>
+
+<file path=ppt/notesSlides/notesSlide12.xml><?xml version="1.0" encoding="utf-8"?>
+<p:notes xmlns:a="http://schemas.openxmlformats.org/drawingml/2006/main" xmlns:r="http://schemas.openxmlformats.org/officeDocument/2006/relationships" xmlns:p="http://schemas.openxmlformats.org/presentationml/2006/main">
+  <p:cSld>
+    <p:spTree>
+      <p:nvGrpSpPr>
+        <p:cNvPr id="1" name=""/>
+        <p:cNvGrpSpPr/>
+        <p:nvPr/>
+      </p:nvGrpSpPr>
+      <p:grpSpPr>
+        <a:xfrm>
+          <a:off x="0" y="0"/>
+          <a:ext cx="0" cy="0"/>
+          <a:chOff x="0" y="0"/>
+          <a:chExt cx="0" cy="0"/>
+        </a:xfrm>
+      </p:grpSpPr>
+      <p:sp>
+        <p:nvSpPr>
+          <p:cNvPr id="2" name="Slide Image Placeholder 1"/>
+          <p:cNvSpPr>
+            <a:spLocks noGrp="1" noRot="1" noChangeAspect="1"/>
+          </p:cNvSpPr>
+          <p:nvPr>
+            <p:ph type="sldImg"/>
+          </p:nvPr>
+        </p:nvSpPr>
+        <p:spPr/>
+      </p:sp>
+      <p:sp>
+        <p:nvSpPr>
+          <p:cNvPr id="3" name="Notes Placeholder 2"/>
+          <p:cNvSpPr>
+            <a:spLocks noGrp="1"/>
+          </p:cNvSpPr>
+          <p:nvPr>
+            <p:ph type="body" idx="1"/>
+          </p:nvPr>
+        </p:nvSpPr>
+        <p:spPr/>
+        <p:txBody>
+          <a:bodyPr/>
+          <a:lstStyle/>
+          <a:p>
+            <a:r>
+              <a:rPr lang="nl-BE"/>
+              <a:t>https://alan-turing-institute.github.io/rsd-engineeringcourse/</a:t>
+            </a:r>
+          </a:p>
+        </p:txBody>
+      </p:sp>
+      <p:sp>
+        <p:nvSpPr>
+          <p:cNvPr id="4" name="Slide Number Placeholder 3"/>
+          <p:cNvSpPr>
+            <a:spLocks noGrp="1"/>
+          </p:cNvSpPr>
+          <p:nvPr>
+            <p:ph type="sldNum" sz="quarter" idx="10"/>
+          </p:nvPr>
+        </p:nvSpPr>
+        <p:spPr/>
+        <p:txBody>
+          <a:bodyPr/>
+          <a:lstStyle/>
+          <a:p>
+            <a:fld id="{4D40F272-7F92-4FF0-959A-28E623229BE1}" type="slidenum">
+              <a:rPr lang="nl-BE" smtClean="0"/>
+              <a:t>34</a:t>
             </a:fld>
             <a:endParaRPr lang="nl-BE"/>
           </a:p>
@@ -10007,7 +10093,7 @@
 </p:notes>
 </file>
 
-<file path=ppt/notesSlides/notesSlide12.xml><?xml version="1.0" encoding="utf-8"?>
+<file path=ppt/notesSlides/notesSlide13.xml><?xml version="1.0" encoding="utf-8"?>
 <p:notes xmlns:a="http://schemas.openxmlformats.org/drawingml/2006/main" xmlns:r="http://schemas.openxmlformats.org/officeDocument/2006/relationships" xmlns:p="http://schemas.openxmlformats.org/presentationml/2006/main">
   <p:cSld>
     <p:spTree>
@@ -10210,7 +10296,7 @@
           <a:p>
             <a:fld id="{9C424A52-08C0-451B-93C1-5D19497E9661}" type="slidenum">
               <a:rPr lang="nl-BE" smtClean="0"/>
-              <a:t>39</a:t>
+              <a:t>40</a:t>
             </a:fld>
             <a:endParaRPr lang="nl-BE"/>
           </a:p>
@@ -10822,7 +10908,13 @@
   <p:cSld>
     <p:spTree>
       <p:nvGrpSpPr>
-        <p:cNvPr id="1" name=""/>
+        <p:cNvPr id="1" name="">
+          <a:extLst>
+            <a:ext uri="{FF2B5EF4-FFF2-40B4-BE49-F238E27FC236}">
+              <a16:creationId xmlns:a16="http://schemas.microsoft.com/office/drawing/2014/main" id="{6D63E956-3D9F-ACA1-B276-2021F9680EAC}"/>
+            </a:ext>
+          </a:extLst>
+        </p:cNvPr>
         <p:cNvGrpSpPr/>
         <p:nvPr/>
       </p:nvGrpSpPr>
@@ -10836,7 +10928,13 @@
       </p:grpSpPr>
       <p:sp>
         <p:nvSpPr>
-          <p:cNvPr id="2" name="Slide Image Placeholder 1"/>
+          <p:cNvPr id="2" name="Slide Image Placeholder 1">
+            <a:extLst>
+              <a:ext uri="{FF2B5EF4-FFF2-40B4-BE49-F238E27FC236}">
+                <a16:creationId xmlns:a16="http://schemas.microsoft.com/office/drawing/2014/main" id="{5703B97F-8ABE-7BCF-D494-8E64418DF194}"/>
+              </a:ext>
+            </a:extLst>
+          </p:cNvPr>
           <p:cNvSpPr>
             <a:spLocks noGrp="1" noRot="1" noChangeAspect="1"/>
           </p:cNvSpPr>
@@ -10848,7 +10946,13 @@
       </p:sp>
       <p:sp>
         <p:nvSpPr>
-          <p:cNvPr id="3" name="Notes Placeholder 2"/>
+          <p:cNvPr id="3" name="Notes Placeholder 2">
+            <a:extLst>
+              <a:ext uri="{FF2B5EF4-FFF2-40B4-BE49-F238E27FC236}">
+                <a16:creationId xmlns:a16="http://schemas.microsoft.com/office/drawing/2014/main" id="{BBA37649-F21F-ECAA-ECE7-7379A7E331F4}"/>
+              </a:ext>
+            </a:extLst>
+          </p:cNvPr>
           <p:cNvSpPr>
             <a:spLocks noGrp="1"/>
           </p:cNvSpPr>
@@ -10861,18 +10965,138 @@
           <a:bodyPr/>
           <a:lstStyle/>
           <a:p>
-            <a:endParaRPr lang="en-BE" dirty="0"/>
+            <a:r>
+              <a:rPr lang="en-US" dirty="0" err="1"/>
+              <a:t>Opstarten</a:t>
+            </a:r>
+            <a:r>
+              <a:rPr lang="en-US" dirty="0"/>
+              <a:t> </a:t>
+            </a:r>
+            <a:r>
+              <a:rPr lang="en-US" dirty="0" err="1"/>
+              <a:t>Omgeving</a:t>
+            </a:r>
+            <a:endParaRPr lang="en-US" dirty="0"/>
+          </a:p>
+          <a:p>
+            <a:endParaRPr lang="en-US" dirty="0"/>
+          </a:p>
+          <a:p>
+            <a:pPr marL="228600" indent="-228600">
+              <a:buAutoNum type="arabicPeriod"/>
+            </a:pPr>
+            <a:r>
+              <a:rPr lang="en-US" dirty="0"/>
+              <a:t>Anaconda</a:t>
+            </a:r>
+          </a:p>
+          <a:p>
+            <a:pPr marL="685800" lvl="1" indent="-228600">
+              <a:buAutoNum type="arabicPeriod"/>
+            </a:pPr>
+            <a:r>
+              <a:rPr lang="en-US" dirty="0" err="1"/>
+              <a:t>Spyder</a:t>
+            </a:r>
+            <a:endParaRPr lang="en-US" dirty="0"/>
+          </a:p>
+          <a:p>
+            <a:pPr marL="228600" lvl="0" indent="-228600">
+              <a:buAutoNum type="arabicPeriod"/>
+            </a:pPr>
+            <a:r>
+              <a:rPr lang="en-US" dirty="0"/>
+              <a:t>Anaconda</a:t>
+            </a:r>
+            <a:r>
+              <a:rPr lang="en-US" baseline="0" dirty="0"/>
+              <a:t> </a:t>
+            </a:r>
+            <a:r>
+              <a:rPr lang="en-US" baseline="0" dirty="0" err="1"/>
+              <a:t>Powershell</a:t>
+            </a:r>
+            <a:endParaRPr lang="en-US" baseline="0" dirty="0"/>
+          </a:p>
+          <a:p>
+            <a:pPr marL="685800" lvl="1" indent="-228600">
+              <a:buAutoNum type="arabicPeriod"/>
+            </a:pPr>
+            <a:r>
+              <a:rPr lang="en-US" baseline="0" dirty="0" err="1"/>
+              <a:t>Naar</a:t>
+            </a:r>
+            <a:r>
+              <a:rPr lang="en-US" baseline="0" dirty="0"/>
+              <a:t> folder met </a:t>
+            </a:r>
+            <a:r>
+              <a:rPr lang="en-US" baseline="0" dirty="0" err="1"/>
+              <a:t>vbn</a:t>
+            </a:r>
+            <a:endParaRPr lang="en-US" baseline="0" dirty="0"/>
+          </a:p>
+          <a:p>
+            <a:pPr marL="685800" lvl="1" indent="-228600">
+              <a:buAutoNum type="arabicPeriod"/>
+            </a:pPr>
+            <a:r>
+              <a:rPr lang="en-US" baseline="0" dirty="0" err="1"/>
+              <a:t>Opstarten</a:t>
+            </a:r>
+            <a:r>
+              <a:rPr lang="en-US" baseline="0" dirty="0"/>
+              <a:t> </a:t>
+            </a:r>
+            <a:r>
+              <a:rPr lang="en-US" baseline="0" dirty="0" err="1"/>
+              <a:t>Jupyter</a:t>
+            </a:r>
+            <a:r>
+              <a:rPr lang="en-US" baseline="0" dirty="0"/>
+              <a:t> notebook</a:t>
+            </a:r>
+          </a:p>
+          <a:p>
+            <a:pPr marL="685800" lvl="1" indent="-228600">
+              <a:buAutoNum type="arabicPeriod"/>
+            </a:pPr>
+            <a:r>
+              <a:rPr lang="en-US" baseline="0" dirty="0" err="1"/>
+              <a:t>Jupyter</a:t>
+            </a:r>
+            <a:r>
+              <a:rPr lang="en-US" baseline="0" dirty="0"/>
+              <a:t> notebook</a:t>
+            </a:r>
+            <a:endParaRPr lang="nl-BE" dirty="0"/>
+          </a:p>
+          <a:p>
+            <a:endParaRPr lang="nl-BE" dirty="0"/>
+          </a:p>
+          <a:p>
+            <a:r>
+              <a:rPr lang="nl-BE" dirty="0"/>
+              <a:t>Voorbeeld C:\Temp\Develop\PythonDev\infosession\PythonIntro</a:t>
+            </a:r>
           </a:p>
         </p:txBody>
       </p:sp>
       <p:sp>
         <p:nvSpPr>
-          <p:cNvPr id="4" name="Slide Number Placeholder 3"/>
+          <p:cNvPr id="4" name="Slide Number Placeholder 3">
+            <a:extLst>
+              <a:ext uri="{FF2B5EF4-FFF2-40B4-BE49-F238E27FC236}">
+                <a16:creationId xmlns:a16="http://schemas.microsoft.com/office/drawing/2014/main" id="{653229B7-FA50-8AD8-1772-8FF45B64190C}"/>
+              </a:ext>
+            </a:extLst>
+          </p:cNvPr>
           <p:cNvSpPr>
             <a:spLocks noGrp="1"/>
           </p:cNvSpPr>
           <p:nvPr>
-            <p:ph type="sldNum" sz="quarter" idx="5"/>
+            <p:ph type="sldNum" sz="quarter" idx="10"/>
           </p:nvPr>
         </p:nvSpPr>
         <p:spPr/>
@@ -10880,9 +11104,9 @@
           <a:bodyPr/>
           <a:lstStyle/>
           <a:p>
-            <a:fld id="{4D40F272-7F92-4FF0-959A-28E623229BE1}" type="slidenum">
+            <a:fld id="{9C424A52-08C0-451B-93C1-5D19497E9661}" type="slidenum">
               <a:rPr lang="nl-BE" smtClean="0"/>
-              <a:t>19</a:t>
+              <a:t>14</a:t>
             </a:fld>
             <a:endParaRPr lang="nl-BE"/>
           </a:p>
@@ -10891,7 +11115,7 @@
     </p:spTree>
     <p:extLst>
       <p:ext uri="{BB962C8B-B14F-4D97-AF65-F5344CB8AC3E}">
-        <p14:creationId xmlns:p14="http://schemas.microsoft.com/office/powerpoint/2010/main" val="1338787028"/>
+        <p14:creationId xmlns:p14="http://schemas.microsoft.com/office/powerpoint/2010/main" val="722269154"/>
       </p:ext>
     </p:extLst>
   </p:cSld>
@@ -10945,211 +11169,6 @@
           <a:bodyPr/>
           <a:lstStyle/>
           <a:p>
-            <a:r>
-              <a:rPr lang="en-US" b="0" i="0" dirty="0">
-                <a:solidFill>
-                  <a:srgbClr val="000000"/>
-                </a:solidFill>
-                <a:effectLst/>
-                <a:latin typeface="Arial" panose="020B0604020202020204" pitchFamily="34" charset="0"/>
-              </a:rPr>
-              <a:t>Almost all programs consist of the same basic 'building blocks', assembled in different ways to achieve a particular goal. </a:t>
-            </a:r>
-            <a:r>
-              <a:rPr lang="en-US" b="1" i="0" dirty="0">
-                <a:solidFill>
-                  <a:srgbClr val="000000"/>
-                </a:solidFill>
-                <a:effectLst/>
-                <a:latin typeface="Arial" panose="020B0604020202020204" pitchFamily="34" charset="0"/>
-              </a:rPr>
-              <a:t>Variables</a:t>
-            </a:r>
-            <a:r>
-              <a:rPr lang="en-US" b="0" i="0" dirty="0">
-                <a:solidFill>
-                  <a:srgbClr val="000000"/>
-                </a:solidFill>
-                <a:effectLst/>
-                <a:latin typeface="Arial" panose="020B0604020202020204" pitchFamily="34" charset="0"/>
-              </a:rPr>
-              <a:t>, </a:t>
-            </a:r>
-            <a:r>
-              <a:rPr lang="en-US" b="1" i="0" dirty="0">
-                <a:solidFill>
-                  <a:srgbClr val="000000"/>
-                </a:solidFill>
-                <a:effectLst/>
-                <a:latin typeface="Arial" panose="020B0604020202020204" pitchFamily="34" charset="0"/>
-              </a:rPr>
-              <a:t>data types</a:t>
-            </a:r>
-            <a:r>
-              <a:rPr lang="en-US" b="0" i="0" dirty="0">
-                <a:solidFill>
-                  <a:srgbClr val="000000"/>
-                </a:solidFill>
-                <a:effectLst/>
-                <a:latin typeface="Arial" panose="020B0604020202020204" pitchFamily="34" charset="0"/>
-              </a:rPr>
-              <a:t>, </a:t>
-            </a:r>
-            <a:r>
-              <a:rPr lang="en-US" b="1" i="0" dirty="0">
-                <a:solidFill>
-                  <a:srgbClr val="000000"/>
-                </a:solidFill>
-                <a:effectLst/>
-                <a:latin typeface="Arial" panose="020B0604020202020204" pitchFamily="34" charset="0"/>
-              </a:rPr>
-              <a:t>sequence</a:t>
-            </a:r>
-            <a:r>
-              <a:rPr lang="en-US" b="0" i="0" dirty="0">
-                <a:solidFill>
-                  <a:srgbClr val="000000"/>
-                </a:solidFill>
-                <a:effectLst/>
-                <a:latin typeface="Arial" panose="020B0604020202020204" pitchFamily="34" charset="0"/>
-              </a:rPr>
-              <a:t>, </a:t>
-            </a:r>
-            <a:r>
-              <a:rPr lang="en-US" b="1" i="0" dirty="0">
-                <a:solidFill>
-                  <a:srgbClr val="000000"/>
-                </a:solidFill>
-                <a:effectLst/>
-                <a:latin typeface="Arial" panose="020B0604020202020204" pitchFamily="34" charset="0"/>
-              </a:rPr>
-              <a:t>selection</a:t>
-            </a:r>
-            <a:r>
-              <a:rPr lang="en-US" b="0" i="0" dirty="0">
-                <a:solidFill>
-                  <a:srgbClr val="000000"/>
-                </a:solidFill>
-                <a:effectLst/>
-                <a:latin typeface="Arial" panose="020B0604020202020204" pitchFamily="34" charset="0"/>
-              </a:rPr>
-              <a:t>, and </a:t>
-            </a:r>
-            <a:r>
-              <a:rPr lang="en-US" b="1" i="0" dirty="0">
-                <a:solidFill>
-                  <a:srgbClr val="000000"/>
-                </a:solidFill>
-                <a:effectLst/>
-                <a:latin typeface="Arial" panose="020B0604020202020204" pitchFamily="34" charset="0"/>
-              </a:rPr>
-              <a:t>iteration</a:t>
-            </a:r>
-            <a:r>
-              <a:rPr lang="en-US" b="0" i="0" dirty="0">
-                <a:solidFill>
-                  <a:srgbClr val="000000"/>
-                </a:solidFill>
-                <a:effectLst/>
-                <a:latin typeface="Arial" panose="020B0604020202020204" pitchFamily="34" charset="0"/>
-              </a:rPr>
-              <a:t> are examples of these basic concepts, which all new programmers need to learn. In order to compare and manipulate data, and to make decisions in a program, programmers use a variety of different </a:t>
-            </a:r>
-            <a:r>
-              <a:rPr lang="en-US" b="1" i="0" dirty="0">
-                <a:solidFill>
-                  <a:srgbClr val="000000"/>
-                </a:solidFill>
-                <a:effectLst/>
-                <a:latin typeface="Arial" panose="020B0604020202020204" pitchFamily="34" charset="0"/>
-              </a:rPr>
-              <a:t>logical</a:t>
-            </a:r>
-            <a:r>
-              <a:rPr lang="en-US" b="0" i="0" dirty="0">
-                <a:solidFill>
-                  <a:srgbClr val="000000"/>
-                </a:solidFill>
-                <a:effectLst/>
-                <a:latin typeface="Arial" panose="020B0604020202020204" pitchFamily="34" charset="0"/>
-              </a:rPr>
-              <a:t>, </a:t>
-            </a:r>
-            <a:r>
-              <a:rPr lang="en-US" b="1" i="0" dirty="0">
-                <a:solidFill>
-                  <a:srgbClr val="000000"/>
-                </a:solidFill>
-                <a:effectLst/>
-                <a:latin typeface="Arial" panose="020B0604020202020204" pitchFamily="34" charset="0"/>
-              </a:rPr>
-              <a:t>relational</a:t>
-            </a:r>
-            <a:r>
-              <a:rPr lang="en-US" b="0" i="0" dirty="0">
-                <a:solidFill>
-                  <a:srgbClr val="000000"/>
-                </a:solidFill>
-                <a:effectLst/>
-                <a:latin typeface="Arial" panose="020B0604020202020204" pitchFamily="34" charset="0"/>
-              </a:rPr>
-              <a:t>, and </a:t>
-            </a:r>
-            <a:r>
-              <a:rPr lang="en-US" b="1" i="0" dirty="0">
-                <a:solidFill>
-                  <a:srgbClr val="000000"/>
-                </a:solidFill>
-                <a:effectLst/>
-                <a:latin typeface="Arial" panose="020B0604020202020204" pitchFamily="34" charset="0"/>
-              </a:rPr>
-              <a:t>arithmetic operators</a:t>
-            </a:r>
-            <a:r>
-              <a:rPr lang="en-US" b="0" i="0" dirty="0">
-                <a:solidFill>
-                  <a:srgbClr val="000000"/>
-                </a:solidFill>
-                <a:effectLst/>
-                <a:latin typeface="Arial" panose="020B0604020202020204" pitchFamily="34" charset="0"/>
-              </a:rPr>
-              <a:t>. It is also useful to be able to generate </a:t>
-            </a:r>
-            <a:r>
-              <a:rPr lang="en-US" b="1" i="0" dirty="0">
-                <a:solidFill>
-                  <a:srgbClr val="000000"/>
-                </a:solidFill>
-                <a:effectLst/>
-                <a:latin typeface="Arial" panose="020B0604020202020204" pitchFamily="34" charset="0"/>
-              </a:rPr>
-              <a:t>randomness</a:t>
-            </a:r>
-            <a:r>
-              <a:rPr lang="en-US" b="0" i="0" dirty="0">
-                <a:solidFill>
-                  <a:srgbClr val="000000"/>
-                </a:solidFill>
-                <a:effectLst/>
-                <a:latin typeface="Arial" panose="020B0604020202020204" pitchFamily="34" charset="0"/>
-              </a:rPr>
-              <a:t> in a program, for example selecting a random number or a random item from a list.</a:t>
-            </a:r>
-          </a:p>
-          <a:p>
-            <a:endParaRPr lang="en-US" b="0" i="0" dirty="0">
-              <a:solidFill>
-                <a:srgbClr val="000000"/>
-              </a:solidFill>
-              <a:effectLst/>
-              <a:latin typeface="Arial" panose="020B0604020202020204" pitchFamily="34" charset="0"/>
-            </a:endParaRPr>
-          </a:p>
-          <a:p>
-            <a:r>
-              <a:rPr lang="nl-BE" dirty="0"/>
-              <a:t>https://isaaccomputerscience.org/topics/programming_concepts?examBoard=all&amp;stage=all</a:t>
-            </a:r>
             <a:endParaRPr lang="en-BE" dirty="0"/>
           </a:p>
         </p:txBody>
@@ -11169,18 +11188,18 @@
           <a:bodyPr/>
           <a:lstStyle/>
           <a:p>
-            <a:fld id="{8954E32A-327F-AF4B-8E1F-209FBF93D26D}" type="slidenum">
-              <a:rPr lang="nl-NL" smtClean="0"/>
-              <a:t>24</a:t>
+            <a:fld id="{4D40F272-7F92-4FF0-959A-28E623229BE1}" type="slidenum">
+              <a:rPr lang="nl-BE" smtClean="0"/>
+              <a:t>20</a:t>
             </a:fld>
-            <a:endParaRPr lang="nl-NL"/>
+            <a:endParaRPr lang="nl-BE"/>
           </a:p>
         </p:txBody>
       </p:sp>
     </p:spTree>
     <p:extLst>
       <p:ext uri="{BB962C8B-B14F-4D97-AF65-F5344CB8AC3E}">
-        <p14:creationId xmlns:p14="http://schemas.microsoft.com/office/powerpoint/2010/main" val="369029995"/>
+        <p14:creationId xmlns:p14="http://schemas.microsoft.com/office/powerpoint/2010/main" val="1338787028"/>
       </p:ext>
     </p:extLst>
   </p:cSld>
@@ -11469,7 +11488,7 @@
     </p:spTree>
     <p:extLst>
       <p:ext uri="{BB962C8B-B14F-4D97-AF65-F5344CB8AC3E}">
-        <p14:creationId xmlns:p14="http://schemas.microsoft.com/office/powerpoint/2010/main" val="2026927814"/>
+        <p14:creationId xmlns:p14="http://schemas.microsoft.com/office/powerpoint/2010/main" val="369029995"/>
       </p:ext>
     </p:extLst>
   </p:cSld>
@@ -11523,7 +11542,212 @@
           <a:bodyPr/>
           <a:lstStyle/>
           <a:p>
-            <a:endParaRPr lang="nl-BE" dirty="0"/>
+            <a:r>
+              <a:rPr lang="en-US" b="0" i="0" dirty="0">
+                <a:solidFill>
+                  <a:srgbClr val="000000"/>
+                </a:solidFill>
+                <a:effectLst/>
+                <a:latin typeface="Arial" panose="020B0604020202020204" pitchFamily="34" charset="0"/>
+              </a:rPr>
+              <a:t>Almost all programs consist of the same basic 'building blocks', assembled in different ways to achieve a particular goal. </a:t>
+            </a:r>
+            <a:r>
+              <a:rPr lang="en-US" b="1" i="0" dirty="0">
+                <a:solidFill>
+                  <a:srgbClr val="000000"/>
+                </a:solidFill>
+                <a:effectLst/>
+                <a:latin typeface="Arial" panose="020B0604020202020204" pitchFamily="34" charset="0"/>
+              </a:rPr>
+              <a:t>Variables</a:t>
+            </a:r>
+            <a:r>
+              <a:rPr lang="en-US" b="0" i="0" dirty="0">
+                <a:solidFill>
+                  <a:srgbClr val="000000"/>
+                </a:solidFill>
+                <a:effectLst/>
+                <a:latin typeface="Arial" panose="020B0604020202020204" pitchFamily="34" charset="0"/>
+              </a:rPr>
+              <a:t>, </a:t>
+            </a:r>
+            <a:r>
+              <a:rPr lang="en-US" b="1" i="0" dirty="0">
+                <a:solidFill>
+                  <a:srgbClr val="000000"/>
+                </a:solidFill>
+                <a:effectLst/>
+                <a:latin typeface="Arial" panose="020B0604020202020204" pitchFamily="34" charset="0"/>
+              </a:rPr>
+              <a:t>data types</a:t>
+            </a:r>
+            <a:r>
+              <a:rPr lang="en-US" b="0" i="0" dirty="0">
+                <a:solidFill>
+                  <a:srgbClr val="000000"/>
+                </a:solidFill>
+                <a:effectLst/>
+                <a:latin typeface="Arial" panose="020B0604020202020204" pitchFamily="34" charset="0"/>
+              </a:rPr>
+              <a:t>, </a:t>
+            </a:r>
+            <a:r>
+              <a:rPr lang="en-US" b="1" i="0" dirty="0">
+                <a:solidFill>
+                  <a:srgbClr val="000000"/>
+                </a:solidFill>
+                <a:effectLst/>
+                <a:latin typeface="Arial" panose="020B0604020202020204" pitchFamily="34" charset="0"/>
+              </a:rPr>
+              <a:t>sequence</a:t>
+            </a:r>
+            <a:r>
+              <a:rPr lang="en-US" b="0" i="0" dirty="0">
+                <a:solidFill>
+                  <a:srgbClr val="000000"/>
+                </a:solidFill>
+                <a:effectLst/>
+                <a:latin typeface="Arial" panose="020B0604020202020204" pitchFamily="34" charset="0"/>
+              </a:rPr>
+              <a:t>, </a:t>
+            </a:r>
+            <a:r>
+              <a:rPr lang="en-US" b="1" i="0" dirty="0">
+                <a:solidFill>
+                  <a:srgbClr val="000000"/>
+                </a:solidFill>
+                <a:effectLst/>
+                <a:latin typeface="Arial" panose="020B0604020202020204" pitchFamily="34" charset="0"/>
+              </a:rPr>
+              <a:t>selection</a:t>
+            </a:r>
+            <a:r>
+              <a:rPr lang="en-US" b="0" i="0" dirty="0">
+                <a:solidFill>
+                  <a:srgbClr val="000000"/>
+                </a:solidFill>
+                <a:effectLst/>
+                <a:latin typeface="Arial" panose="020B0604020202020204" pitchFamily="34" charset="0"/>
+              </a:rPr>
+              <a:t>, and </a:t>
+            </a:r>
+            <a:r>
+              <a:rPr lang="en-US" b="1" i="0" dirty="0">
+                <a:solidFill>
+                  <a:srgbClr val="000000"/>
+                </a:solidFill>
+                <a:effectLst/>
+                <a:latin typeface="Arial" panose="020B0604020202020204" pitchFamily="34" charset="0"/>
+              </a:rPr>
+              <a:t>iteration</a:t>
+            </a:r>
+            <a:r>
+              <a:rPr lang="en-US" b="0" i="0" dirty="0">
+                <a:solidFill>
+                  <a:srgbClr val="000000"/>
+                </a:solidFill>
+                <a:effectLst/>
+                <a:latin typeface="Arial" panose="020B0604020202020204" pitchFamily="34" charset="0"/>
+              </a:rPr>
+              <a:t> are examples of these basic concepts, which all new programmers need to learn. In order to compare and manipulate data, and to make decisions in a program, programmers use a variety of different </a:t>
+            </a:r>
+            <a:r>
+              <a:rPr lang="en-US" b="1" i="0" dirty="0">
+                <a:solidFill>
+                  <a:srgbClr val="000000"/>
+                </a:solidFill>
+                <a:effectLst/>
+                <a:latin typeface="Arial" panose="020B0604020202020204" pitchFamily="34" charset="0"/>
+              </a:rPr>
+              <a:t>logical</a:t>
+            </a:r>
+            <a:r>
+              <a:rPr lang="en-US" b="0" i="0" dirty="0">
+                <a:solidFill>
+                  <a:srgbClr val="000000"/>
+                </a:solidFill>
+                <a:effectLst/>
+                <a:latin typeface="Arial" panose="020B0604020202020204" pitchFamily="34" charset="0"/>
+              </a:rPr>
+              <a:t>, </a:t>
+            </a:r>
+            <a:r>
+              <a:rPr lang="en-US" b="1" i="0" dirty="0">
+                <a:solidFill>
+                  <a:srgbClr val="000000"/>
+                </a:solidFill>
+                <a:effectLst/>
+                <a:latin typeface="Arial" panose="020B0604020202020204" pitchFamily="34" charset="0"/>
+              </a:rPr>
+              <a:t>relational</a:t>
+            </a:r>
+            <a:r>
+              <a:rPr lang="en-US" b="0" i="0" dirty="0">
+                <a:solidFill>
+                  <a:srgbClr val="000000"/>
+                </a:solidFill>
+                <a:effectLst/>
+                <a:latin typeface="Arial" panose="020B0604020202020204" pitchFamily="34" charset="0"/>
+              </a:rPr>
+              <a:t>, and </a:t>
+            </a:r>
+            <a:r>
+              <a:rPr lang="en-US" b="1" i="0" dirty="0">
+                <a:solidFill>
+                  <a:srgbClr val="000000"/>
+                </a:solidFill>
+                <a:effectLst/>
+                <a:latin typeface="Arial" panose="020B0604020202020204" pitchFamily="34" charset="0"/>
+              </a:rPr>
+              <a:t>arithmetic operators</a:t>
+            </a:r>
+            <a:r>
+              <a:rPr lang="en-US" b="0" i="0" dirty="0">
+                <a:solidFill>
+                  <a:srgbClr val="000000"/>
+                </a:solidFill>
+                <a:effectLst/>
+                <a:latin typeface="Arial" panose="020B0604020202020204" pitchFamily="34" charset="0"/>
+              </a:rPr>
+              <a:t>. It is also useful to be able to generate </a:t>
+            </a:r>
+            <a:r>
+              <a:rPr lang="en-US" b="1" i="0" dirty="0">
+                <a:solidFill>
+                  <a:srgbClr val="000000"/>
+                </a:solidFill>
+                <a:effectLst/>
+                <a:latin typeface="Arial" panose="020B0604020202020204" pitchFamily="34" charset="0"/>
+              </a:rPr>
+              <a:t>randomness</a:t>
+            </a:r>
+            <a:r>
+              <a:rPr lang="en-US" b="0" i="0" dirty="0">
+                <a:solidFill>
+                  <a:srgbClr val="000000"/>
+                </a:solidFill>
+                <a:effectLst/>
+                <a:latin typeface="Arial" panose="020B0604020202020204" pitchFamily="34" charset="0"/>
+              </a:rPr>
+              <a:t> in a program, for example selecting a random number or a random item from a list.</a:t>
+            </a:r>
+          </a:p>
+          <a:p>
+            <a:endParaRPr lang="en-US" b="0" i="0" dirty="0">
+              <a:solidFill>
+                <a:srgbClr val="000000"/>
+              </a:solidFill>
+              <a:effectLst/>
+              <a:latin typeface="Arial" panose="020B0604020202020204" pitchFamily="34" charset="0"/>
+            </a:endParaRPr>
+          </a:p>
+          <a:p>
+            <a:r>
+              <a:rPr lang="nl-BE" dirty="0"/>
+              <a:t>https://isaaccomputerscience.org/topics/programming_concepts?examBoard=all&amp;stage=all</a:t>
+            </a:r>
+            <a:endParaRPr lang="en-BE" dirty="0"/>
           </a:p>
         </p:txBody>
       </p:sp>
@@ -11534,7 +11758,7 @@
             <a:spLocks noGrp="1"/>
           </p:cNvSpPr>
           <p:nvPr>
-            <p:ph type="sldNum" sz="quarter" idx="10"/>
+            <p:ph type="sldNum" sz="quarter" idx="5"/>
           </p:nvPr>
         </p:nvSpPr>
         <p:spPr/>
@@ -11542,18 +11766,18 @@
           <a:bodyPr/>
           <a:lstStyle/>
           <a:p>
-            <a:fld id="{4D40F272-7F92-4FF0-959A-28E623229BE1}" type="slidenum">
-              <a:rPr lang="nl-BE" smtClean="0"/>
-              <a:t>27</a:t>
+            <a:fld id="{8954E32A-327F-AF4B-8E1F-209FBF93D26D}" type="slidenum">
+              <a:rPr lang="nl-NL" smtClean="0"/>
+              <a:t>26</a:t>
             </a:fld>
-            <a:endParaRPr lang="nl-BE"/>
+            <a:endParaRPr lang="nl-NL"/>
           </a:p>
         </p:txBody>
       </p:sp>
     </p:spTree>
     <p:extLst>
       <p:ext uri="{BB962C8B-B14F-4D97-AF65-F5344CB8AC3E}">
-        <p14:creationId xmlns:p14="http://schemas.microsoft.com/office/powerpoint/2010/main" val="2498757725"/>
+        <p14:creationId xmlns:p14="http://schemas.microsoft.com/office/powerpoint/2010/main" val="2026927814"/>
       </p:ext>
     </p:extLst>
   </p:cSld>
@@ -11799,7 +12023,7 @@
           <a:p>
             <a:fld id="{F4D79F2A-C2D7-4941-A36E-1F6A2F4B862D}" type="datetimeFigureOut">
               <a:rPr lang="nl-BE" smtClean="0"/>
-              <a:t>12/10/2025</a:t>
+              <a:t>1/10/2026</a:t>
             </a:fld>
             <a:endParaRPr lang="nl-BE"/>
           </a:p>
@@ -11979,7 +12203,7 @@
           <a:p>
             <a:fld id="{F4D79F2A-C2D7-4941-A36E-1F6A2F4B862D}" type="datetimeFigureOut">
               <a:rPr lang="nl-BE" smtClean="0"/>
-              <a:t>12/10/2025</a:t>
+              <a:t>1/10/2026</a:t>
             </a:fld>
             <a:endParaRPr lang="nl-BE"/>
           </a:p>
@@ -12607,7 +12831,7 @@
           <a:p>
             <a:fld id="{F4D79F2A-C2D7-4941-A36E-1F6A2F4B862D}" type="datetimeFigureOut">
               <a:rPr lang="nl-BE" smtClean="0"/>
-              <a:t>12/10/2025</a:t>
+              <a:t>1/10/2026</a:t>
             </a:fld>
             <a:endParaRPr lang="nl-BE"/>
           </a:p>
@@ -12853,7 +13077,7 @@
           <a:p>
             <a:fld id="{F4D79F2A-C2D7-4941-A36E-1F6A2F4B862D}" type="datetimeFigureOut">
               <a:rPr lang="nl-BE" smtClean="0"/>
-              <a:t>12/10/2025</a:t>
+              <a:t>1/10/2026</a:t>
             </a:fld>
             <a:endParaRPr lang="nl-BE"/>
           </a:p>
@@ -13085,7 +13309,7 @@
           <a:p>
             <a:fld id="{F4D79F2A-C2D7-4941-A36E-1F6A2F4B862D}" type="datetimeFigureOut">
               <a:rPr lang="nl-BE" smtClean="0"/>
-              <a:t>12/10/2025</a:t>
+              <a:t>1/10/2026</a:t>
             </a:fld>
             <a:endParaRPr lang="nl-BE"/>
           </a:p>
@@ -13452,7 +13676,7 @@
           <a:p>
             <a:fld id="{F4D79F2A-C2D7-4941-A36E-1F6A2F4B862D}" type="datetimeFigureOut">
               <a:rPr lang="nl-BE" smtClean="0"/>
-              <a:t>12/10/2025</a:t>
+              <a:t>1/10/2026</a:t>
             </a:fld>
             <a:endParaRPr lang="nl-BE"/>
           </a:p>
@@ -13570,7 +13794,7 @@
           <a:p>
             <a:fld id="{F4D79F2A-C2D7-4941-A36E-1F6A2F4B862D}" type="datetimeFigureOut">
               <a:rPr lang="nl-BE" smtClean="0"/>
-              <a:t>12/10/2025</a:t>
+              <a:t>1/10/2026</a:t>
             </a:fld>
             <a:endParaRPr lang="nl-BE"/>
           </a:p>
@@ -13665,7 +13889,7 @@
           <a:p>
             <a:fld id="{F4D79F2A-C2D7-4941-A36E-1F6A2F4B862D}" type="datetimeFigureOut">
               <a:rPr lang="nl-BE" smtClean="0"/>
-              <a:t>12/10/2025</a:t>
+              <a:t>1/10/2026</a:t>
             </a:fld>
             <a:endParaRPr lang="nl-BE"/>
           </a:p>
@@ -13942,7 +14166,7 @@
           <a:p>
             <a:fld id="{F4D79F2A-C2D7-4941-A36E-1F6A2F4B862D}" type="datetimeFigureOut">
               <a:rPr lang="nl-BE" smtClean="0"/>
-              <a:t>12/10/2025</a:t>
+              <a:t>1/10/2026</a:t>
             </a:fld>
             <a:endParaRPr lang="nl-BE"/>
           </a:p>
@@ -14195,7 +14419,7 @@
           <a:p>
             <a:fld id="{F4D79F2A-C2D7-4941-A36E-1F6A2F4B862D}" type="datetimeFigureOut">
               <a:rPr lang="nl-BE" smtClean="0"/>
-              <a:t>12/10/2025</a:t>
+              <a:t>1/10/2026</a:t>
             </a:fld>
             <a:endParaRPr lang="nl-BE"/>
           </a:p>
@@ -14408,7 +14632,7 @@
           <a:p>
             <a:fld id="{F4D79F2A-C2D7-4941-A36E-1F6A2F4B862D}" type="datetimeFigureOut">
               <a:rPr lang="nl-BE" smtClean="0"/>
-              <a:t>12/10/2025</a:t>
+              <a:t>1/10/2026</a:t>
             </a:fld>
             <a:endParaRPr lang="nl-BE"/>
           </a:p>
@@ -14904,7 +15128,23 @@
             </a:br>
             <a:r>
               <a:rPr lang="en-US" sz="2400" dirty="0"/>
-              <a:t>13 and 15 October 2025</a:t>
+              <a:t>6</a:t>
+            </a:r>
+            <a:r>
+              <a:rPr lang="en-US" sz="2400" baseline="30000" dirty="0"/>
+              <a:t>th</a:t>
+            </a:r>
+            <a:r>
+              <a:rPr lang="en-US" sz="2400" dirty="0"/>
+              <a:t> and 7</a:t>
+            </a:r>
+            <a:r>
+              <a:rPr lang="en-US" sz="2400" baseline="30000" dirty="0"/>
+              <a:t>th</a:t>
+            </a:r>
+            <a:r>
+              <a:rPr lang="en-US" sz="2400" dirty="0"/>
+              <a:t> October 2026</a:t>
             </a:r>
             <a:endParaRPr lang="nl-BE" sz="2400" dirty="0"/>
           </a:p>
@@ -15283,7 +15523,7 @@
         <p:spPr/>
         <p:txBody>
           <a:bodyPr>
-            <a:normAutofit fontScale="92500" lnSpcReduction="10000"/>
+            <a:normAutofit/>
           </a:bodyPr>
           <a:lstStyle/>
           <a:p>
@@ -15301,7 +15541,7 @@
           <a:p>
             <a:r>
               <a:rPr lang="en-US" dirty="0"/>
-              <a:t>Unzip the file a local disk (Windows ex. in c:\Temp)</a:t>
+              <a:t>Unzip the file on a local disk</a:t>
             </a:r>
           </a:p>
           <a:p>
@@ -15314,48 +15554,13 @@
             <a:pPr lvl="1"/>
             <a:r>
               <a:rPr lang="en-US" dirty="0"/>
-              <a:t>Start </a:t>
+              <a:t>Directly in </a:t>
             </a:r>
             <a:r>
               <a:rPr lang="en-US" dirty="0" err="1"/>
-              <a:t>powershell</a:t>
-            </a:r>
-            <a:r>
-              <a:rPr lang="en-US" dirty="0"/>
-              <a:t> python environment</a:t>
-            </a:r>
-          </a:p>
-          <a:p>
-            <a:pPr lvl="2"/>
-            <a:r>
-              <a:rPr lang="en-US" dirty="0"/>
-              <a:t>‘cd’ to the folder with </a:t>
-            </a:r>
-            <a:r>
-              <a:rPr lang="en-US" dirty="0" err="1"/>
-              <a:t>ipynb</a:t>
-            </a:r>
-            <a:r>
-              <a:rPr lang="en-US" dirty="0"/>
-              <a:t> files</a:t>
-            </a:r>
-          </a:p>
-          <a:p>
-            <a:pPr lvl="2"/>
-            <a:r>
-              <a:rPr lang="en-US" dirty="0" err="1">
-                <a:latin typeface="Courier New" panose="02070309020205020404" pitchFamily="49" charset="0"/>
-                <a:cs typeface="Courier New" panose="02070309020205020404" pitchFamily="49" charset="0"/>
-              </a:rPr>
-              <a:t>jupyter</a:t>
-            </a:r>
-            <a:r>
-              <a:rPr lang="en-US" dirty="0">
-                <a:latin typeface="Courier New" panose="02070309020205020404" pitchFamily="49" charset="0"/>
-                <a:cs typeface="Courier New" panose="02070309020205020404" pitchFamily="49" charset="0"/>
-              </a:rPr>
-              <a:t> lab</a:t>
-            </a:r>
+              <a:t>VSCode</a:t>
+            </a:r>
+            <a:endParaRPr lang="en-US" dirty="0"/>
           </a:p>
           <a:p>
             <a:r>
@@ -15383,10 +15588,35 @@
             <a:pPr lvl="1"/>
             <a:r>
               <a:rPr lang="en-US" dirty="0"/>
+              <a:t>In </a:t>
+            </a:r>
+            <a:r>
+              <a:rPr lang="en-US" dirty="0" err="1"/>
+              <a:t>VSCode</a:t>
+            </a:r>
+            <a:r>
+              <a:rPr lang="en-US" dirty="0"/>
+              <a:t> open a terminal</a:t>
+            </a:r>
+          </a:p>
+          <a:p>
+            <a:pPr lvl="1"/>
+            <a:r>
+              <a:rPr lang="en-US" dirty="0"/>
               <a:t>‘cd’ to the folder with </a:t>
             </a:r>
             <a:r>
-              <a:rPr lang="en-US" dirty="0" err="1"/>
+              <a:rPr lang="en-US" dirty="0">
+                <a:latin typeface="Courier New" panose="02070309020205020404" pitchFamily="49" charset="0"/>
+                <a:cs typeface="Courier New" panose="02070309020205020404" pitchFamily="49" charset="0"/>
+              </a:rPr>
+              <a:t>*.</a:t>
+            </a:r>
+            <a:r>
+              <a:rPr lang="en-US" dirty="0" err="1">
+                <a:latin typeface="Courier New" panose="02070309020205020404" pitchFamily="49" charset="0"/>
+                <a:cs typeface="Courier New" panose="02070309020205020404" pitchFamily="49" charset="0"/>
+              </a:rPr>
               <a:t>py</a:t>
             </a:r>
             <a:r>
@@ -15398,14 +15628,7 @@
             <a:pPr lvl="1"/>
             <a:r>
               <a:rPr lang="en-US" dirty="0"/>
-              <a:t>Start editor / IDE</a:t>
-            </a:r>
-          </a:p>
-          <a:p>
-            <a:pPr lvl="1"/>
-            <a:r>
-              <a:rPr lang="en-US" dirty="0"/>
-              <a:t>Run from command line</a:t>
+              <a:t>Run from command line, e.g. python </a:t>
             </a:r>
           </a:p>
           <a:p>
@@ -15554,7 +15777,7 @@
         <p:spPr>
           <a:xfrm>
             <a:off x="481781" y="1825625"/>
-            <a:ext cx="3185651" cy="2492990"/>
+            <a:ext cx="3333080" cy="3693319"/>
           </a:xfrm>
           <a:prstGeom prst="rect">
             <a:avLst/>
@@ -15643,9 +15866,39 @@
               </a:rPr>
               <a:t> 2.0</a:t>
             </a:r>
-            <a:endParaRPr lang="en-US" sz="2600" dirty="0">
-              <a:hlinkClick r:id="rId4"/>
-            </a:endParaRPr>
+            <a:endParaRPr lang="en-US" sz="2600" dirty="0"/>
+          </a:p>
+          <a:p>
+            <a:pPr marL="457200" indent="-457200">
+              <a:buFont typeface="Courier New" panose="02070309020205020404" pitchFamily="49" charset="0"/>
+              <a:buChar char="o"/>
+            </a:pPr>
+            <a:r>
+              <a:rPr lang="en-US" sz="2600" dirty="0" err="1">
+                <a:hlinkClick r:id="rId7"/>
+              </a:rPr>
+              <a:t>StackOverflow</a:t>
+            </a:r>
+            <a:r>
+              <a:rPr lang="en-US" sz="2600" dirty="0">
+                <a:hlinkClick r:id="rId7"/>
+              </a:rPr>
+              <a:t> 2025 technologies</a:t>
+            </a:r>
+            <a:endParaRPr lang="en-US" sz="2600" dirty="0"/>
+          </a:p>
+          <a:p>
+            <a:pPr marL="457200" indent="-457200">
+              <a:buFont typeface="Courier New" panose="02070309020205020404" pitchFamily="49" charset="0"/>
+              <a:buChar char="o"/>
+            </a:pPr>
+            <a:r>
+              <a:rPr lang="en-US" sz="2600" dirty="0">
+                <a:hlinkClick r:id="rId8"/>
+              </a:rPr>
+              <a:t>Python applications</a:t>
+            </a:r>
+            <a:endParaRPr lang="en-US" sz="2600" dirty="0"/>
           </a:p>
         </p:txBody>
       </p:sp>
@@ -15663,6 +15916,194 @@
 </file>
 
 <file path=ppt/slides/slide14.xml><?xml version="1.0" encoding="utf-8"?>
+<p:sld xmlns:a="http://schemas.openxmlformats.org/drawingml/2006/main" xmlns:r="http://schemas.openxmlformats.org/officeDocument/2006/relationships" xmlns:p="http://schemas.openxmlformats.org/presentationml/2006/main">
+  <p:cSld>
+    <p:spTree>
+      <p:nvGrpSpPr>
+        <p:cNvPr id="1" name="">
+          <a:extLst>
+            <a:ext uri="{FF2B5EF4-FFF2-40B4-BE49-F238E27FC236}">
+              <a16:creationId xmlns:a16="http://schemas.microsoft.com/office/drawing/2014/main" id="{F9D54C83-02A4-02B3-A24B-4D475F072BD7}"/>
+            </a:ext>
+          </a:extLst>
+        </p:cNvPr>
+        <p:cNvGrpSpPr/>
+        <p:nvPr/>
+      </p:nvGrpSpPr>
+      <p:grpSpPr>
+        <a:xfrm>
+          <a:off x="0" y="0"/>
+          <a:ext cx="0" cy="0"/>
+          <a:chOff x="0" y="0"/>
+          <a:chExt cx="0" cy="0"/>
+        </a:xfrm>
+      </p:grpSpPr>
+      <p:sp>
+        <p:nvSpPr>
+          <p:cNvPr id="3" name="Title 2">
+            <a:extLst>
+              <a:ext uri="{FF2B5EF4-FFF2-40B4-BE49-F238E27FC236}">
+                <a16:creationId xmlns:a16="http://schemas.microsoft.com/office/drawing/2014/main" id="{B188EFFD-3D12-D589-46B0-3FC38DF3F077}"/>
+              </a:ext>
+            </a:extLst>
+          </p:cNvPr>
+          <p:cNvSpPr>
+            <a:spLocks noGrp="1"/>
+          </p:cNvSpPr>
+          <p:nvPr>
+            <p:ph type="title"/>
+          </p:nvPr>
+        </p:nvSpPr>
+        <p:spPr/>
+        <p:txBody>
+          <a:bodyPr/>
+          <a:lstStyle/>
+          <a:p>
+            <a:r>
+              <a:rPr lang="en-US" dirty="0"/>
+              <a:t>How popular is Python (late 2026)?</a:t>
+            </a:r>
+            <a:endParaRPr lang="nl-BE" dirty="0"/>
+          </a:p>
+        </p:txBody>
+      </p:sp>
+      <p:pic>
+        <p:nvPicPr>
+          <p:cNvPr id="7" name="Picture 6">
+            <a:extLst>
+              <a:ext uri="{FF2B5EF4-FFF2-40B4-BE49-F238E27FC236}">
+                <a16:creationId xmlns:a16="http://schemas.microsoft.com/office/drawing/2014/main" id="{9B62B0A7-8608-D683-8BCC-7A23911EED2E}"/>
+              </a:ext>
+            </a:extLst>
+          </p:cNvPr>
+          <p:cNvPicPr>
+            <a:picLocks noChangeAspect="1"/>
+          </p:cNvPicPr>
+          <p:nvPr/>
+        </p:nvPicPr>
+        <p:blipFill>
+          <a:blip r:embed="rId3">
+            <a:extLst>
+              <a:ext uri="{28A0092B-C50C-407E-A947-70E740481C1C}">
+                <a14:useLocalDpi xmlns:a14="http://schemas.microsoft.com/office/drawing/2010/main" val="0"/>
+              </a:ext>
+            </a:extLst>
+          </a:blip>
+          <a:srcRect/>
+          <a:stretch/>
+        </p:blipFill>
+        <p:spPr>
+          <a:xfrm>
+            <a:off x="3814861" y="2133186"/>
+            <a:ext cx="8197700" cy="3596868"/>
+          </a:xfrm>
+          <a:prstGeom prst="rect">
+            <a:avLst/>
+          </a:prstGeom>
+        </p:spPr>
+      </p:pic>
+      <p:sp>
+        <p:nvSpPr>
+          <p:cNvPr id="8" name="TextBox 7">
+            <a:extLst>
+              <a:ext uri="{FF2B5EF4-FFF2-40B4-BE49-F238E27FC236}">
+                <a16:creationId xmlns:a16="http://schemas.microsoft.com/office/drawing/2014/main" id="{501C0DE2-BF97-3B53-8025-90E6BB2C1E2D}"/>
+              </a:ext>
+            </a:extLst>
+          </p:cNvPr>
+          <p:cNvSpPr txBox="1"/>
+          <p:nvPr/>
+        </p:nvSpPr>
+        <p:spPr>
+          <a:xfrm>
+            <a:off x="481781" y="1825625"/>
+            <a:ext cx="3185651" cy="2092881"/>
+          </a:xfrm>
+          <a:prstGeom prst="rect">
+            <a:avLst/>
+          </a:prstGeom>
+          <a:noFill/>
+        </p:spPr>
+        <p:txBody>
+          <a:bodyPr wrap="square" rtlCol="0">
+            <a:spAutoFit/>
+          </a:bodyPr>
+          <a:lstStyle/>
+          <a:p>
+            <a:pPr marL="457200" indent="-457200">
+              <a:buFont typeface="Courier New" panose="02070309020205020404" pitchFamily="49" charset="0"/>
+              <a:buChar char="o"/>
+            </a:pPr>
+            <a:r>
+              <a:rPr lang="en-US" sz="2600" dirty="0" err="1">
+                <a:hlinkClick r:id="rId4"/>
+              </a:rPr>
+              <a:t>Tiobe</a:t>
+            </a:r>
+            <a:r>
+              <a:rPr lang="en-US" sz="2600" dirty="0">
+                <a:hlinkClick r:id="rId4"/>
+              </a:rPr>
+              <a:t> index</a:t>
+            </a:r>
+            <a:endParaRPr lang="en-US" sz="2600" dirty="0"/>
+          </a:p>
+          <a:p>
+            <a:pPr marL="457200" indent="-457200">
+              <a:buFont typeface="Courier New" panose="02070309020205020404" pitchFamily="49" charset="0"/>
+              <a:buChar char="o"/>
+            </a:pPr>
+            <a:r>
+              <a:rPr lang="en-US" sz="2600" dirty="0"/>
+              <a:t>September 2026</a:t>
+            </a:r>
+          </a:p>
+          <a:p>
+            <a:pPr marL="457200" indent="-457200">
+              <a:buFont typeface="Courier New" panose="02070309020205020404" pitchFamily="49" charset="0"/>
+              <a:buChar char="o"/>
+            </a:pPr>
+            <a:r>
+              <a:rPr lang="en-US" sz="2600" dirty="0"/>
+              <a:t>Top 10 have stayed</a:t>
+            </a:r>
+          </a:p>
+          <a:p>
+            <a:pPr marL="457200" indent="-457200">
+              <a:buFont typeface="Courier New" panose="02070309020205020404" pitchFamily="49" charset="0"/>
+              <a:buChar char="o"/>
+            </a:pPr>
+            <a:r>
+              <a:rPr lang="en-US" sz="2600" dirty="0"/>
+              <a:t>Top 7 kept position</a:t>
+            </a:r>
+          </a:p>
+          <a:p>
+            <a:pPr marL="457200" indent="-457200">
+              <a:buFont typeface="Courier New" panose="02070309020205020404" pitchFamily="49" charset="0"/>
+              <a:buChar char="o"/>
+            </a:pPr>
+            <a:r>
+              <a:rPr lang="en-US" sz="2600" dirty="0"/>
+              <a:t>Ratings changed</a:t>
+            </a:r>
+          </a:p>
+        </p:txBody>
+      </p:sp>
+    </p:spTree>
+    <p:extLst>
+      <p:ext uri="{BB962C8B-B14F-4D97-AF65-F5344CB8AC3E}">
+        <p14:creationId xmlns:p14="http://schemas.microsoft.com/office/powerpoint/2010/main" val="1367998773"/>
+      </p:ext>
+    </p:extLst>
+  </p:cSld>
+  <p:clrMapOvr>
+    <a:masterClrMapping/>
+  </p:clrMapOvr>
+</p:sld>
+</file>
+
+<file path=ppt/slides/slide15.xml><?xml version="1.0" encoding="utf-8"?>
 <p:sld xmlns:a="http://schemas.openxmlformats.org/drawingml/2006/main" xmlns:r="http://schemas.openxmlformats.org/officeDocument/2006/relationships" xmlns:p="http://schemas.openxmlformats.org/presentationml/2006/main" show="0">
   <p:cSld>
     <p:spTree>
@@ -15738,7 +16179,7 @@
           <a:p>
             <a:fld id="{5A209D72-2E9D-49B0-8977-41DCCC66C0BB}" type="slidenum">
               <a:rPr lang="nl-BE" smtClean="0"/>
-              <a:t>14</a:t>
+              <a:t>15</a:t>
             </a:fld>
             <a:endParaRPr lang="nl-BE"/>
           </a:p>
@@ -15757,7 +16198,7 @@
 </p:sld>
 </file>
 
-<file path=ppt/slides/slide15.xml><?xml version="1.0" encoding="utf-8"?>
+<file path=ppt/slides/slide16.xml><?xml version="1.0" encoding="utf-8"?>
 <p:sld xmlns:a="http://schemas.openxmlformats.org/drawingml/2006/main" xmlns:r="http://schemas.openxmlformats.org/officeDocument/2006/relationships" xmlns:p="http://schemas.openxmlformats.org/presentationml/2006/main" show="0">
   <p:cSld>
     <p:spTree>
@@ -15910,159 +16351,6 @@
     <p:extLst>
       <p:ext uri="{BB962C8B-B14F-4D97-AF65-F5344CB8AC3E}">
         <p14:creationId xmlns:p14="http://schemas.microsoft.com/office/powerpoint/2010/main" val="766940309"/>
-      </p:ext>
-    </p:extLst>
-  </p:cSld>
-  <p:clrMapOvr>
-    <a:masterClrMapping/>
-  </p:clrMapOvr>
-</p:sld>
-</file>
-
-<file path=ppt/slides/slide16.xml><?xml version="1.0" encoding="utf-8"?>
-<p:sld xmlns:a="http://schemas.openxmlformats.org/drawingml/2006/main" xmlns:r="http://schemas.openxmlformats.org/officeDocument/2006/relationships" xmlns:p="http://schemas.openxmlformats.org/presentationml/2006/main" show="0">
-  <p:cSld>
-    <p:spTree>
-      <p:nvGrpSpPr>
-        <p:cNvPr id="1" name=""/>
-        <p:cNvGrpSpPr/>
-        <p:nvPr/>
-      </p:nvGrpSpPr>
-      <p:grpSpPr>
-        <a:xfrm>
-          <a:off x="0" y="0"/>
-          <a:ext cx="0" cy="0"/>
-          <a:chOff x="0" y="0"/>
-          <a:chExt cx="0" cy="0"/>
-        </a:xfrm>
-      </p:grpSpPr>
-      <p:sp>
-        <p:nvSpPr>
-          <p:cNvPr id="2" name="Title 1"/>
-          <p:cNvSpPr>
-            <a:spLocks noGrp="1"/>
-          </p:cNvSpPr>
-          <p:nvPr>
-            <p:ph type="title"/>
-          </p:nvPr>
-        </p:nvSpPr>
-        <p:spPr/>
-        <p:txBody>
-          <a:bodyPr/>
-          <a:lstStyle/>
-          <a:p>
-            <a:r>
-              <a:rPr lang="nl-BE" dirty="0"/>
-              <a:t>More in </a:t>
-            </a:r>
-            <a:r>
-              <a:rPr lang="nl-BE" dirty="0" err="1"/>
-              <a:t>other</a:t>
-            </a:r>
-            <a:r>
-              <a:rPr lang="nl-BE" dirty="0"/>
-              <a:t> courses</a:t>
-            </a:r>
-          </a:p>
-        </p:txBody>
-      </p:sp>
-      <p:sp>
-        <p:nvSpPr>
-          <p:cNvPr id="3" name="Content Placeholder 2"/>
-          <p:cNvSpPr>
-            <a:spLocks noGrp="1"/>
-          </p:cNvSpPr>
-          <p:nvPr>
-            <p:ph idx="1"/>
-          </p:nvPr>
-        </p:nvSpPr>
-        <p:spPr/>
-        <p:txBody>
-          <a:bodyPr>
-            <a:normAutofit/>
-          </a:bodyPr>
-          <a:lstStyle/>
-          <a:p>
-            <a:r>
-              <a:rPr lang="en-US" dirty="0"/>
-              <a:t>Testing</a:t>
-            </a:r>
-          </a:p>
-          <a:p>
-            <a:pPr lvl="1"/>
-            <a:r>
-              <a:rPr lang="en-US" dirty="0"/>
-              <a:t>goals: tests are integral part of software development</a:t>
-            </a:r>
-          </a:p>
-          <a:p>
-            <a:r>
-              <a:rPr lang="en-US" dirty="0"/>
-              <a:t>Error handling</a:t>
-            </a:r>
-          </a:p>
-          <a:p>
-            <a:pPr lvl="1"/>
-            <a:r>
-              <a:rPr lang="en-US" dirty="0"/>
-              <a:t>goals: catch &amp; handle runtime errors</a:t>
-            </a:r>
-          </a:p>
-          <a:p>
-            <a:r>
-              <a:rPr lang="en-US" dirty="0"/>
-              <a:t>Debugging</a:t>
-            </a:r>
-          </a:p>
-          <a:p>
-            <a:pPr lvl="1"/>
-            <a:r>
-              <a:rPr lang="en-US" dirty="0"/>
-              <a:t>goals: using the Python debugger</a:t>
-            </a:r>
-          </a:p>
-          <a:p>
-            <a:r>
-              <a:rPr lang="en-US" dirty="0"/>
-              <a:t>Profiling</a:t>
-            </a:r>
-          </a:p>
-          <a:p>
-            <a:pPr lvl="1"/>
-            <a:r>
-              <a:rPr lang="en-US" dirty="0"/>
-              <a:t>goals: using the Python profiler to identify optimization opportunities</a:t>
-            </a:r>
-          </a:p>
-        </p:txBody>
-      </p:sp>
-      <p:sp>
-        <p:nvSpPr>
-          <p:cNvPr id="4" name="Slide Number Placeholder 3"/>
-          <p:cNvSpPr>
-            <a:spLocks noGrp="1"/>
-          </p:cNvSpPr>
-          <p:nvPr>
-            <p:ph type="sldNum" sz="quarter" idx="12"/>
-          </p:nvPr>
-        </p:nvSpPr>
-        <p:spPr/>
-        <p:txBody>
-          <a:bodyPr/>
-          <a:lstStyle/>
-          <a:p>
-            <a:fld id="{5A209D72-2E9D-49B0-8977-41DCCC66C0BB}" type="slidenum">
-              <a:rPr lang="nl-BE" smtClean="0"/>
-              <a:t>16</a:t>
-            </a:fld>
-            <a:endParaRPr lang="nl-BE"/>
-          </a:p>
-        </p:txBody>
-      </p:sp>
-    </p:spTree>
-    <p:extLst>
-      <p:ext uri="{BB962C8B-B14F-4D97-AF65-F5344CB8AC3E}">
-        <p14:creationId xmlns:p14="http://schemas.microsoft.com/office/powerpoint/2010/main" val="3883408371"/>
       </p:ext>
     </p:extLst>
   </p:cSld>
@@ -16138,57 +16426,54 @@
           <a:p>
             <a:r>
               <a:rPr lang="en-US" dirty="0"/>
-              <a:t>Command line arguments &amp; configuration files</a:t>
+              <a:t>Testing</a:t>
             </a:r>
           </a:p>
           <a:p>
             <a:pPr lvl="1"/>
             <a:r>
               <a:rPr lang="en-US" dirty="0"/>
-              <a:t>goals: handling options, flags specified on command line, reading configuration files</a:t>
-            </a:r>
-          </a:p>
-          <a:p>
-            <a:r>
-              <a:rPr lang="en-US" dirty="0"/>
-              <a:t>Logging</a:t>
+              <a:t>goals: tests are integral part of software development</a:t>
+            </a:r>
+          </a:p>
+          <a:p>
+            <a:r>
+              <a:rPr lang="en-US" dirty="0"/>
+              <a:t>Error handling</a:t>
             </a:r>
           </a:p>
           <a:p>
             <a:pPr lvl="1"/>
             <a:r>
               <a:rPr lang="en-US" dirty="0"/>
-              <a:t>goals: writing application events to log files, using log levels</a:t>
-            </a:r>
-          </a:p>
-          <a:p>
-            <a:r>
-              <a:rPr lang="en-US" dirty="0"/>
-              <a:t>Interacting with the operating system</a:t>
+              <a:t>goals: catch &amp; handle runtime errors</a:t>
+            </a:r>
+          </a:p>
+          <a:p>
+            <a:r>
+              <a:rPr lang="en-US" dirty="0"/>
+              <a:t>Debugging</a:t>
             </a:r>
           </a:p>
           <a:p>
             <a:pPr lvl="1"/>
             <a:r>
               <a:rPr lang="en-US" dirty="0"/>
-              <a:t>goals: file system operations, executing external commands</a:t>
-            </a:r>
-          </a:p>
-          <a:p>
-            <a:r>
-              <a:rPr lang="en-US" dirty="0"/>
-              <a:t>Web applications</a:t>
+              <a:t>goals: using the Python debugger</a:t>
+            </a:r>
+          </a:p>
+          <a:p>
+            <a:r>
+              <a:rPr lang="en-US" dirty="0"/>
+              <a:t>Profiling</a:t>
             </a:r>
           </a:p>
           <a:p>
             <a:pPr lvl="1"/>
             <a:r>
               <a:rPr lang="en-US" dirty="0"/>
-              <a:t>goals: basic concepts of web application development</a:t>
-            </a:r>
-          </a:p>
-          <a:p>
-            <a:endParaRPr lang="en-US" dirty="0"/>
+              <a:t>goals: using the Python profiler to identify optimization opportunities</a:t>
+            </a:r>
           </a:p>
         </p:txBody>
       </p:sp>
@@ -16218,7 +16503,7 @@
     </p:spTree>
     <p:extLst>
       <p:ext uri="{BB962C8B-B14F-4D97-AF65-F5344CB8AC3E}">
-        <p14:creationId xmlns:p14="http://schemas.microsoft.com/office/powerpoint/2010/main" val="1301390248"/>
+        <p14:creationId xmlns:p14="http://schemas.microsoft.com/office/powerpoint/2010/main" val="3883408371"/>
       </p:ext>
     </p:extLst>
   </p:cSld>
@@ -16294,54 +16579,57 @@
           <a:p>
             <a:r>
               <a:rPr lang="en-US" dirty="0"/>
-              <a:t>Text-based formats</a:t>
+              <a:t>Command line arguments &amp; configuration files</a:t>
             </a:r>
           </a:p>
           <a:p>
             <a:pPr lvl="1"/>
             <a:r>
               <a:rPr lang="en-US" dirty="0"/>
-              <a:t>goals: reading &amp; writing text-based file formats</a:t>
-            </a:r>
-          </a:p>
-          <a:p>
-            <a:r>
-              <a:rPr lang="en-US" dirty="0"/>
-              <a:t>Scientific file formats</a:t>
+              <a:t>goals: handling options, flags specified on command line, reading configuration files</a:t>
+            </a:r>
+          </a:p>
+          <a:p>
+            <a:r>
+              <a:rPr lang="en-US" dirty="0"/>
+              <a:t>Logging</a:t>
             </a:r>
           </a:p>
           <a:p>
             <a:pPr lvl="1"/>
             <a:r>
               <a:rPr lang="en-US" dirty="0"/>
-              <a:t>goals: reading &amp; writing HDF5</a:t>
-            </a:r>
-          </a:p>
-          <a:p>
-            <a:r>
-              <a:rPr lang="en-US" dirty="0"/>
-              <a:t>Linear algebra, numerical analysis</a:t>
+              <a:t>goals: writing application events to log files, using log levels</a:t>
+            </a:r>
+          </a:p>
+          <a:p>
+            <a:r>
+              <a:rPr lang="en-US" dirty="0"/>
+              <a:t>Interacting with the operating system</a:t>
             </a:r>
           </a:p>
           <a:p>
             <a:pPr lvl="1"/>
             <a:r>
               <a:rPr lang="en-US" dirty="0"/>
-              <a:t>goals: various numerical analysis algorithms</a:t>
-            </a:r>
-          </a:p>
-          <a:p>
-            <a:r>
-              <a:rPr lang="en-US" dirty="0"/>
-              <a:t>Scientific visualization</a:t>
+              <a:t>goals: file system operations, executing external commands</a:t>
+            </a:r>
+          </a:p>
+          <a:p>
+            <a:r>
+              <a:rPr lang="en-US" dirty="0"/>
+              <a:t>Web applications</a:t>
             </a:r>
           </a:p>
           <a:p>
             <a:pPr lvl="1"/>
             <a:r>
               <a:rPr lang="en-US" dirty="0"/>
-              <a:t>goals: creating 2D and 3D plots from Python</a:t>
-            </a:r>
+              <a:t>goals: basic concepts of web application development</a:t>
+            </a:r>
+          </a:p>
+          <a:p>
+            <a:endParaRPr lang="en-US" dirty="0"/>
           </a:p>
         </p:txBody>
       </p:sp>
@@ -16371,6 +16659,159 @@
     </p:spTree>
     <p:extLst>
       <p:ext uri="{BB962C8B-B14F-4D97-AF65-F5344CB8AC3E}">
+        <p14:creationId xmlns:p14="http://schemas.microsoft.com/office/powerpoint/2010/main" val="1301390248"/>
+      </p:ext>
+    </p:extLst>
+  </p:cSld>
+  <p:clrMapOvr>
+    <a:masterClrMapping/>
+  </p:clrMapOvr>
+</p:sld>
+</file>
+
+<file path=ppt/slides/slide19.xml><?xml version="1.0" encoding="utf-8"?>
+<p:sld xmlns:a="http://schemas.openxmlformats.org/drawingml/2006/main" xmlns:r="http://schemas.openxmlformats.org/officeDocument/2006/relationships" xmlns:p="http://schemas.openxmlformats.org/presentationml/2006/main" show="0">
+  <p:cSld>
+    <p:spTree>
+      <p:nvGrpSpPr>
+        <p:cNvPr id="1" name=""/>
+        <p:cNvGrpSpPr/>
+        <p:nvPr/>
+      </p:nvGrpSpPr>
+      <p:grpSpPr>
+        <a:xfrm>
+          <a:off x="0" y="0"/>
+          <a:ext cx="0" cy="0"/>
+          <a:chOff x="0" y="0"/>
+          <a:chExt cx="0" cy="0"/>
+        </a:xfrm>
+      </p:grpSpPr>
+      <p:sp>
+        <p:nvSpPr>
+          <p:cNvPr id="2" name="Title 1"/>
+          <p:cNvSpPr>
+            <a:spLocks noGrp="1"/>
+          </p:cNvSpPr>
+          <p:nvPr>
+            <p:ph type="title"/>
+          </p:nvPr>
+        </p:nvSpPr>
+        <p:spPr/>
+        <p:txBody>
+          <a:bodyPr/>
+          <a:lstStyle/>
+          <a:p>
+            <a:r>
+              <a:rPr lang="nl-BE" dirty="0"/>
+              <a:t>More in </a:t>
+            </a:r>
+            <a:r>
+              <a:rPr lang="nl-BE" dirty="0" err="1"/>
+              <a:t>other</a:t>
+            </a:r>
+            <a:r>
+              <a:rPr lang="nl-BE" dirty="0"/>
+              <a:t> courses</a:t>
+            </a:r>
+          </a:p>
+        </p:txBody>
+      </p:sp>
+      <p:sp>
+        <p:nvSpPr>
+          <p:cNvPr id="3" name="Content Placeholder 2"/>
+          <p:cNvSpPr>
+            <a:spLocks noGrp="1"/>
+          </p:cNvSpPr>
+          <p:nvPr>
+            <p:ph idx="1"/>
+          </p:nvPr>
+        </p:nvSpPr>
+        <p:spPr/>
+        <p:txBody>
+          <a:bodyPr>
+            <a:normAutofit/>
+          </a:bodyPr>
+          <a:lstStyle/>
+          <a:p>
+            <a:r>
+              <a:rPr lang="en-US" dirty="0"/>
+              <a:t>Text-based formats</a:t>
+            </a:r>
+          </a:p>
+          <a:p>
+            <a:pPr lvl="1"/>
+            <a:r>
+              <a:rPr lang="en-US" dirty="0"/>
+              <a:t>goals: reading &amp; writing text-based file formats</a:t>
+            </a:r>
+          </a:p>
+          <a:p>
+            <a:r>
+              <a:rPr lang="en-US" dirty="0"/>
+              <a:t>Scientific file formats</a:t>
+            </a:r>
+          </a:p>
+          <a:p>
+            <a:pPr lvl="1"/>
+            <a:r>
+              <a:rPr lang="en-US" dirty="0"/>
+              <a:t>goals: reading &amp; writing HDF5</a:t>
+            </a:r>
+          </a:p>
+          <a:p>
+            <a:r>
+              <a:rPr lang="en-US" dirty="0"/>
+              <a:t>Linear algebra, numerical analysis</a:t>
+            </a:r>
+          </a:p>
+          <a:p>
+            <a:pPr lvl="1"/>
+            <a:r>
+              <a:rPr lang="en-US" dirty="0"/>
+              <a:t>goals: various numerical analysis algorithms</a:t>
+            </a:r>
+          </a:p>
+          <a:p>
+            <a:r>
+              <a:rPr lang="en-US" dirty="0"/>
+              <a:t>Scientific visualization</a:t>
+            </a:r>
+          </a:p>
+          <a:p>
+            <a:pPr lvl="1"/>
+            <a:r>
+              <a:rPr lang="en-US" dirty="0"/>
+              <a:t>goals: creating 2D and 3D plots from Python</a:t>
+            </a:r>
+          </a:p>
+        </p:txBody>
+      </p:sp>
+      <p:sp>
+        <p:nvSpPr>
+          <p:cNvPr id="4" name="Slide Number Placeholder 3"/>
+          <p:cNvSpPr>
+            <a:spLocks noGrp="1"/>
+          </p:cNvSpPr>
+          <p:nvPr>
+            <p:ph type="sldNum" sz="quarter" idx="12"/>
+          </p:nvPr>
+        </p:nvSpPr>
+        <p:spPr/>
+        <p:txBody>
+          <a:bodyPr/>
+          <a:lstStyle/>
+          <a:p>
+            <a:fld id="{5A209D72-2E9D-49B0-8977-41DCCC66C0BB}" type="slidenum">
+              <a:rPr lang="nl-BE" smtClean="0"/>
+              <a:t>19</a:t>
+            </a:fld>
+            <a:endParaRPr lang="nl-BE"/>
+          </a:p>
+        </p:txBody>
+      </p:sp>
+    </p:spTree>
+    <p:extLst>
+      <p:ext uri="{BB962C8B-B14F-4D97-AF65-F5344CB8AC3E}">
         <p14:creationId xmlns:p14="http://schemas.microsoft.com/office/powerpoint/2010/main" val="155463295"/>
       </p:ext>
     </p:extLst>
@@ -16381,7 +16822,155 @@
 </p:sld>
 </file>
 
-<file path=ppt/slides/slide19.xml><?xml version="1.0" encoding="utf-8"?>
+<file path=ppt/slides/slide2.xml><?xml version="1.0" encoding="utf-8"?>
+<p:sld xmlns:a="http://schemas.openxmlformats.org/drawingml/2006/main" xmlns:r="http://schemas.openxmlformats.org/officeDocument/2006/relationships" xmlns:p="http://schemas.openxmlformats.org/presentationml/2006/main">
+  <p:cSld>
+    <p:spTree>
+      <p:nvGrpSpPr>
+        <p:cNvPr id="1" name=""/>
+        <p:cNvGrpSpPr/>
+        <p:nvPr/>
+      </p:nvGrpSpPr>
+      <p:grpSpPr>
+        <a:xfrm>
+          <a:off x="0" y="0"/>
+          <a:ext cx="0" cy="0"/>
+          <a:chOff x="0" y="0"/>
+          <a:chExt cx="0" cy="0"/>
+        </a:xfrm>
+      </p:grpSpPr>
+      <p:sp>
+        <p:nvSpPr>
+          <p:cNvPr id="2" name="Content Placeholder 1"/>
+          <p:cNvSpPr>
+            <a:spLocks noGrp="1"/>
+          </p:cNvSpPr>
+          <p:nvPr>
+            <p:ph idx="1"/>
+          </p:nvPr>
+        </p:nvSpPr>
+        <p:spPr/>
+        <p:txBody>
+          <a:bodyPr/>
+          <a:lstStyle/>
+          <a:p>
+            <a:r>
+              <a:rPr lang="en-US" dirty="0"/>
+              <a:t>Credits: Frank Van Puyvelde</a:t>
+            </a:r>
+            <a:br>
+              <a:rPr lang="en-US" dirty="0"/>
+            </a:br>
+            <a:r>
+              <a:rPr lang="en-US" dirty="0"/>
+              <a:t>Original repo: </a:t>
+            </a:r>
+            <a:r>
+              <a:rPr lang="en-US" dirty="0">
+                <a:hlinkClick r:id="rId3"/>
+              </a:rPr>
+              <a:t>https://github.com/franklbvp/python_intro</a:t>
+            </a:r>
+            <a:r>
+              <a:rPr lang="en-US" dirty="0"/>
+              <a:t> </a:t>
+            </a:r>
+            <a:br>
+              <a:rPr lang="en-US" dirty="0"/>
+            </a:br>
+            <a:r>
+              <a:rPr lang="en-US" dirty="0"/>
+              <a:t>This repo is forked in September 2025 for some updates</a:t>
+            </a:r>
+          </a:p>
+          <a:p>
+            <a:r>
+              <a:rPr lang="en-US" dirty="0"/>
+              <a:t>Geert Jan Bex</a:t>
+            </a:r>
+          </a:p>
+          <a:p>
+            <a:pPr lvl="1"/>
+            <a:r>
+              <a:rPr lang="en-US" dirty="0">
+                <a:hlinkClick r:id="rId4"/>
+              </a:rPr>
+              <a:t>https://github.com/gjbex/training-material/tree/master/Python</a:t>
+            </a:r>
+            <a:r>
+              <a:rPr lang="en-US" dirty="0"/>
+              <a:t> </a:t>
+            </a:r>
+          </a:p>
+          <a:p>
+            <a:pPr lvl="1"/>
+            <a:r>
+              <a:rPr lang="nl-BE" dirty="0">
+                <a:hlinkClick r:id="rId5"/>
+              </a:rPr>
+              <a:t>https://creativecommons.org/licenses/by/4.0/deed.ast#</a:t>
+            </a:r>
+            <a:endParaRPr lang="nl-BE" dirty="0"/>
+          </a:p>
+          <a:p>
+            <a:r>
+              <a:rPr lang="en-US" dirty="0"/>
+              <a:t>New repo for (updated) Slides + demo-files</a:t>
+            </a:r>
+          </a:p>
+          <a:p>
+            <a:pPr lvl="1"/>
+            <a:r>
+              <a:rPr lang="en-US" dirty="0">
+                <a:hlinkClick r:id="rId6"/>
+              </a:rPr>
+              <a:t>https://github.com/moravveji/python_intro_training</a:t>
+            </a:r>
+            <a:r>
+              <a:rPr lang="en-US" dirty="0"/>
+              <a:t> </a:t>
+            </a:r>
+            <a:endParaRPr lang="nl-BE" dirty="0"/>
+          </a:p>
+        </p:txBody>
+      </p:sp>
+      <p:sp>
+        <p:nvSpPr>
+          <p:cNvPr id="5" name="Title 4"/>
+          <p:cNvSpPr>
+            <a:spLocks noGrp="1"/>
+          </p:cNvSpPr>
+          <p:nvPr>
+            <p:ph type="title"/>
+          </p:nvPr>
+        </p:nvSpPr>
+        <p:spPr/>
+        <p:txBody>
+          <a:bodyPr/>
+          <a:lstStyle/>
+          <a:p>
+            <a:r>
+              <a:rPr lang="en-US" dirty="0"/>
+              <a:t>Thank You</a:t>
+            </a:r>
+            <a:endParaRPr lang="nl-BE" dirty="0"/>
+          </a:p>
+        </p:txBody>
+      </p:sp>
+    </p:spTree>
+    <p:extLst>
+      <p:ext uri="{BB962C8B-B14F-4D97-AF65-F5344CB8AC3E}">
+        <p14:creationId xmlns:p14="http://schemas.microsoft.com/office/powerpoint/2010/main" val="1980080033"/>
+      </p:ext>
+    </p:extLst>
+  </p:cSld>
+  <p:clrMapOvr>
+    <a:masterClrMapping/>
+  </p:clrMapOvr>
+</p:sld>
+</file>
+
+<file path=ppt/slides/slide20.xml><?xml version="1.0" encoding="utf-8"?>
 <p:sld xmlns:a="http://schemas.openxmlformats.org/drawingml/2006/main" xmlns:r="http://schemas.openxmlformats.org/officeDocument/2006/relationships" xmlns:p="http://schemas.openxmlformats.org/presentationml/2006/main">
   <p:cSld>
     <p:spTree>
@@ -16525,155 +17114,7 @@
 </p:sld>
 </file>
 
-<file path=ppt/slides/slide2.xml><?xml version="1.0" encoding="utf-8"?>
-<p:sld xmlns:a="http://schemas.openxmlformats.org/drawingml/2006/main" xmlns:r="http://schemas.openxmlformats.org/officeDocument/2006/relationships" xmlns:p="http://schemas.openxmlformats.org/presentationml/2006/main">
-  <p:cSld>
-    <p:spTree>
-      <p:nvGrpSpPr>
-        <p:cNvPr id="1" name=""/>
-        <p:cNvGrpSpPr/>
-        <p:nvPr/>
-      </p:nvGrpSpPr>
-      <p:grpSpPr>
-        <a:xfrm>
-          <a:off x="0" y="0"/>
-          <a:ext cx="0" cy="0"/>
-          <a:chOff x="0" y="0"/>
-          <a:chExt cx="0" cy="0"/>
-        </a:xfrm>
-      </p:grpSpPr>
-      <p:sp>
-        <p:nvSpPr>
-          <p:cNvPr id="2" name="Content Placeholder 1"/>
-          <p:cNvSpPr>
-            <a:spLocks noGrp="1"/>
-          </p:cNvSpPr>
-          <p:nvPr>
-            <p:ph idx="1"/>
-          </p:nvPr>
-        </p:nvSpPr>
-        <p:spPr/>
-        <p:txBody>
-          <a:bodyPr/>
-          <a:lstStyle/>
-          <a:p>
-            <a:r>
-              <a:rPr lang="en-US" dirty="0"/>
-              <a:t>Credits: Frank Van Puyvelde</a:t>
-            </a:r>
-            <a:br>
-              <a:rPr lang="en-US" dirty="0"/>
-            </a:br>
-            <a:r>
-              <a:rPr lang="en-US" dirty="0"/>
-              <a:t>Original repo: </a:t>
-            </a:r>
-            <a:r>
-              <a:rPr lang="en-US" dirty="0">
-                <a:hlinkClick r:id="rId3"/>
-              </a:rPr>
-              <a:t>https://github.com/franklbvp/python_intro</a:t>
-            </a:r>
-            <a:r>
-              <a:rPr lang="en-US" dirty="0"/>
-              <a:t> </a:t>
-            </a:r>
-            <a:br>
-              <a:rPr lang="en-US" dirty="0"/>
-            </a:br>
-            <a:r>
-              <a:rPr lang="en-US" dirty="0"/>
-              <a:t>This repo is forked in September 2025 for some updates</a:t>
-            </a:r>
-          </a:p>
-          <a:p>
-            <a:r>
-              <a:rPr lang="en-US" dirty="0"/>
-              <a:t>Geert Jan Bex</a:t>
-            </a:r>
-          </a:p>
-          <a:p>
-            <a:pPr lvl="1"/>
-            <a:r>
-              <a:rPr lang="en-US" dirty="0">
-                <a:hlinkClick r:id="rId4"/>
-              </a:rPr>
-              <a:t>https://github.com/gjbex/training-material/tree/master/Python</a:t>
-            </a:r>
-            <a:r>
-              <a:rPr lang="en-US" dirty="0"/>
-              <a:t> </a:t>
-            </a:r>
-          </a:p>
-          <a:p>
-            <a:pPr lvl="1"/>
-            <a:r>
-              <a:rPr lang="nl-BE" dirty="0">
-                <a:hlinkClick r:id="rId5"/>
-              </a:rPr>
-              <a:t>https://creativecommons.org/licenses/by/4.0/deed.ast#</a:t>
-            </a:r>
-            <a:endParaRPr lang="nl-BE" dirty="0"/>
-          </a:p>
-          <a:p>
-            <a:r>
-              <a:rPr lang="en-US" dirty="0"/>
-              <a:t>(updated) Slides + demo-files</a:t>
-            </a:r>
-          </a:p>
-          <a:p>
-            <a:pPr lvl="1"/>
-            <a:r>
-              <a:rPr lang="en-US" dirty="0">
-                <a:hlinkClick r:id="rId6"/>
-              </a:rPr>
-              <a:t>https://github.com/moravveji/python_intro_training</a:t>
-            </a:r>
-            <a:r>
-              <a:rPr lang="en-US" dirty="0"/>
-              <a:t> </a:t>
-            </a:r>
-            <a:endParaRPr lang="nl-BE" dirty="0"/>
-          </a:p>
-        </p:txBody>
-      </p:sp>
-      <p:sp>
-        <p:nvSpPr>
-          <p:cNvPr id="5" name="Title 4"/>
-          <p:cNvSpPr>
-            <a:spLocks noGrp="1"/>
-          </p:cNvSpPr>
-          <p:nvPr>
-            <p:ph type="title"/>
-          </p:nvPr>
-        </p:nvSpPr>
-        <p:spPr/>
-        <p:txBody>
-          <a:bodyPr/>
-          <a:lstStyle/>
-          <a:p>
-            <a:r>
-              <a:rPr lang="en-US" dirty="0"/>
-              <a:t>Thank You</a:t>
-            </a:r>
-            <a:endParaRPr lang="nl-BE" dirty="0"/>
-          </a:p>
-        </p:txBody>
-      </p:sp>
-    </p:spTree>
-    <p:extLst>
-      <p:ext uri="{BB962C8B-B14F-4D97-AF65-F5344CB8AC3E}">
-        <p14:creationId xmlns:p14="http://schemas.microsoft.com/office/powerpoint/2010/main" val="1980080033"/>
-      </p:ext>
-    </p:extLst>
-  </p:cSld>
-  <p:clrMapOvr>
-    <a:masterClrMapping/>
-  </p:clrMapOvr>
-</p:sld>
-</file>
-
-<file path=ppt/slides/slide20.xml><?xml version="1.0" encoding="utf-8"?>
+<file path=ppt/slides/slide21.xml><?xml version="1.0" encoding="utf-8"?>
 <p:sld xmlns:a="http://schemas.openxmlformats.org/drawingml/2006/main" xmlns:r="http://schemas.openxmlformats.org/officeDocument/2006/relationships" xmlns:p="http://schemas.openxmlformats.org/presentationml/2006/main">
   <p:cSld>
     <p:spTree>
@@ -16919,7 +17360,7 @@
 </p:sld>
 </file>
 
-<file path=ppt/slides/slide21.xml><?xml version="1.0" encoding="utf-8"?>
+<file path=ppt/slides/slide22.xml><?xml version="1.0" encoding="utf-8"?>
 <p:sld xmlns:a="http://schemas.openxmlformats.org/drawingml/2006/main" xmlns:r="http://schemas.openxmlformats.org/officeDocument/2006/relationships" xmlns:p="http://schemas.openxmlformats.org/presentationml/2006/main">
   <p:cSld>
     <p:spTree>
@@ -17071,7 +17512,7 @@
 </p:sld>
 </file>
 
-<file path=ppt/slides/slide22.xml><?xml version="1.0" encoding="utf-8"?>
+<file path=ppt/slides/slide23.xml><?xml version="1.0" encoding="utf-8"?>
 <p:sld xmlns:a="http://schemas.openxmlformats.org/drawingml/2006/main" xmlns:r="http://schemas.openxmlformats.org/officeDocument/2006/relationships" xmlns:p="http://schemas.openxmlformats.org/presentationml/2006/main">
   <p:cSld>
     <p:spTree>
@@ -17220,7 +17661,7 @@
 </p:sld>
 </file>
 
-<file path=ppt/slides/slide23.xml><?xml version="1.0" encoding="utf-8"?>
+<file path=ppt/slides/slide24.xml><?xml version="1.0" encoding="utf-8"?>
 <p:sld xmlns:a="http://schemas.openxmlformats.org/drawingml/2006/main" xmlns:r="http://schemas.openxmlformats.org/officeDocument/2006/relationships" xmlns:p="http://schemas.openxmlformats.org/presentationml/2006/main">
   <p:cSld>
     <p:spTree>
@@ -17259,8 +17700,20 @@
           <a:lstStyle/>
           <a:p>
             <a:r>
+              <a:rPr lang="nl-BE" dirty="0" err="1"/>
+              <a:t>Choosing</a:t>
+            </a:r>
+            <a:r>
               <a:rPr lang="nl-BE" dirty="0"/>
-              <a:t>Programming </a:t>
+              <a:t> a </a:t>
+            </a:r>
+            <a:r>
+              <a:rPr lang="nl-BE" dirty="0" err="1"/>
+              <a:t>programming</a:t>
+            </a:r>
+            <a:r>
+              <a:rPr lang="nl-BE" dirty="0"/>
+              <a:t> </a:t>
             </a:r>
             <a:r>
               <a:rPr lang="nl-BE" dirty="0" err="1"/>
@@ -17286,7 +17739,12 @@
             <p:ph idx="1"/>
           </p:nvPr>
         </p:nvSpPr>
-        <p:spPr/>
+        <p:spPr>
+          <a:xfrm>
+            <a:off x="838200" y="1825625"/>
+            <a:ext cx="10515600" cy="2765036"/>
+          </a:xfrm>
+        </p:spPr>
         <p:txBody>
           <a:bodyPr/>
           <a:lstStyle/>
@@ -17330,26 +17788,21 @@
             <a:pPr lvl="1"/>
             <a:r>
               <a:rPr lang="en-US" dirty="0"/>
-              <a:t>it is suited to the problem </a:t>
-            </a:r>
-            <a:r>
-              <a:rPr lang="en-US"/>
-              <a:t>at hand?</a:t>
-            </a:r>
-            <a:endParaRPr lang="en-US" dirty="0"/>
+              <a:t>If it is suited to the problem at hand?</a:t>
+            </a:r>
           </a:p>
           <a:p>
             <a:pPr lvl="1"/>
             <a:r>
               <a:rPr lang="en-US" dirty="0"/>
-              <a:t>is there an active community?</a:t>
+              <a:t>There is an active user community?</a:t>
             </a:r>
           </a:p>
           <a:p>
             <a:pPr lvl="1"/>
             <a:r>
               <a:rPr lang="en-US" dirty="0"/>
-              <a:t>is it any good for the job market?</a:t>
+              <a:t>Is it relevant for the job market?</a:t>
             </a:r>
             <a:endParaRPr lang="en-BE" dirty="0"/>
           </a:p>
@@ -17359,168 +17812,6 @@
     <p:extLst>
       <p:ext uri="{BB962C8B-B14F-4D97-AF65-F5344CB8AC3E}">
         <p14:creationId xmlns:p14="http://schemas.microsoft.com/office/powerpoint/2010/main" val="418755341"/>
-      </p:ext>
-    </p:extLst>
-  </p:cSld>
-  <p:clrMapOvr>
-    <a:masterClrMapping/>
-  </p:clrMapOvr>
-</p:sld>
-</file>
-
-<file path=ppt/slides/slide24.xml><?xml version="1.0" encoding="utf-8"?>
-<p:sld xmlns:a="http://schemas.openxmlformats.org/drawingml/2006/main" xmlns:r="http://schemas.openxmlformats.org/officeDocument/2006/relationships" xmlns:p="http://schemas.openxmlformats.org/presentationml/2006/main">
-  <p:cSld>
-    <p:spTree>
-      <p:nvGrpSpPr>
-        <p:cNvPr id="1" name=""/>
-        <p:cNvGrpSpPr/>
-        <p:nvPr/>
-      </p:nvGrpSpPr>
-      <p:grpSpPr>
-        <a:xfrm>
-          <a:off x="0" y="0"/>
-          <a:ext cx="0" cy="0"/>
-          <a:chOff x="0" y="0"/>
-          <a:chExt cx="0" cy="0"/>
-        </a:xfrm>
-      </p:grpSpPr>
-      <p:sp>
-        <p:nvSpPr>
-          <p:cNvPr id="2" name="Title 1">
-            <a:extLst>
-              <a:ext uri="{FF2B5EF4-FFF2-40B4-BE49-F238E27FC236}">
-                <a16:creationId xmlns:a16="http://schemas.microsoft.com/office/drawing/2014/main" id="{90C75A3A-6F68-4B94-B969-47ADA48A2E17}"/>
-              </a:ext>
-            </a:extLst>
-          </p:cNvPr>
-          <p:cNvSpPr>
-            <a:spLocks noGrp="1"/>
-          </p:cNvSpPr>
-          <p:nvPr>
-            <p:ph type="title"/>
-          </p:nvPr>
-        </p:nvSpPr>
-        <p:spPr/>
-        <p:txBody>
-          <a:bodyPr/>
-          <a:lstStyle/>
-          <a:p>
-            <a:r>
-              <a:rPr lang="en-US" dirty="0"/>
-              <a:t>Key concepts in programming</a:t>
-            </a:r>
-            <a:endParaRPr lang="en-BE" dirty="0"/>
-          </a:p>
-        </p:txBody>
-      </p:sp>
-      <p:sp>
-        <p:nvSpPr>
-          <p:cNvPr id="3" name="Content Placeholder 2">
-            <a:extLst>
-              <a:ext uri="{FF2B5EF4-FFF2-40B4-BE49-F238E27FC236}">
-                <a16:creationId xmlns:a16="http://schemas.microsoft.com/office/drawing/2014/main" id="{03AE8799-851E-481B-9E3B-8593E5F6F6BB}"/>
-              </a:ext>
-            </a:extLst>
-          </p:cNvPr>
-          <p:cNvSpPr>
-            <a:spLocks noGrp="1"/>
-          </p:cNvSpPr>
-          <p:nvPr>
-            <p:ph idx="1"/>
-          </p:nvPr>
-        </p:nvSpPr>
-        <p:spPr/>
-        <p:txBody>
-          <a:bodyPr>
-            <a:normAutofit fontScale="92500" lnSpcReduction="20000"/>
-          </a:bodyPr>
-          <a:lstStyle/>
-          <a:p>
-            <a:r>
-              <a:rPr lang="en-US" dirty="0"/>
-              <a:t>All programming languages use </a:t>
-            </a:r>
-            <a:r>
-              <a:rPr lang="en-US"/>
-              <a:t>the same basic concepts. </a:t>
-            </a:r>
-            <a:endParaRPr lang="en-US" dirty="0"/>
-          </a:p>
-          <a:p>
-            <a:r>
-              <a:rPr lang="en-US" dirty="0"/>
-              <a:t>Check Isaac Computer Science: </a:t>
-            </a:r>
-            <a:r>
-              <a:rPr lang="en-US" sz="2200" dirty="0">
-                <a:hlinkClick r:id="rId3"/>
-              </a:rPr>
-              <a:t>https://isaaccomputerscience.org/topics/programming_concepts?examBoard=all&amp;stage=all</a:t>
-            </a:r>
-            <a:r>
-              <a:rPr lang="en-US" sz="2200" dirty="0"/>
-              <a:t> </a:t>
-            </a:r>
-          </a:p>
-          <a:p>
-            <a:r>
-              <a:rPr lang="en-US" dirty="0"/>
-              <a:t>Instructions / Basic Syntax</a:t>
-            </a:r>
-          </a:p>
-          <a:p>
-            <a:r>
-              <a:rPr lang="en-US" dirty="0"/>
-              <a:t>Data Types </a:t>
-            </a:r>
-          </a:p>
-          <a:p>
-            <a:pPr lvl="1"/>
-            <a:r>
-              <a:rPr lang="en-US" dirty="0"/>
-              <a:t>Classification of the type of data being stored or manipulated within a program. </a:t>
-            </a:r>
-          </a:p>
-          <a:p>
-            <a:pPr lvl="1"/>
-            <a:r>
-              <a:rPr lang="en-US" dirty="0"/>
-              <a:t>Data types are important because they determine the operations that can be performed on the data.</a:t>
-            </a:r>
-          </a:p>
-          <a:p>
-            <a:r>
-              <a:rPr lang="en-US" dirty="0"/>
-              <a:t>Variables</a:t>
-            </a:r>
-          </a:p>
-          <a:p>
-            <a:pPr lvl="1"/>
-            <a:r>
-              <a:rPr lang="en-US" dirty="0"/>
-              <a:t>Named container, held by the computer in a memory location. </a:t>
-            </a:r>
-          </a:p>
-          <a:p>
-            <a:pPr lvl="1"/>
-            <a:r>
-              <a:rPr lang="en-US" dirty="0"/>
-              <a:t>Has a unique identifier (name) that refers to a value.</a:t>
-            </a:r>
-          </a:p>
-          <a:p>
-            <a:r>
-              <a:rPr lang="en-US" dirty="0"/>
-              <a:t>Input / Output</a:t>
-            </a:r>
-          </a:p>
-        </p:txBody>
-      </p:sp>
-    </p:spTree>
-    <p:extLst>
-      <p:ext uri="{BB962C8B-B14F-4D97-AF65-F5344CB8AC3E}">
-        <p14:creationId xmlns:p14="http://schemas.microsoft.com/office/powerpoint/2010/main" val="68602542"/>
       </p:ext>
     </p:extLst>
   </p:cSld>
@@ -17595,6 +17886,168 @@
         <p:spPr/>
         <p:txBody>
           <a:bodyPr>
+            <a:normAutofit fontScale="92500" lnSpcReduction="20000"/>
+          </a:bodyPr>
+          <a:lstStyle/>
+          <a:p>
+            <a:r>
+              <a:rPr lang="en-US" dirty="0"/>
+              <a:t>All programming languages use </a:t>
+            </a:r>
+            <a:r>
+              <a:rPr lang="en-US"/>
+              <a:t>the same basic concepts. </a:t>
+            </a:r>
+            <a:endParaRPr lang="en-US" dirty="0"/>
+          </a:p>
+          <a:p>
+            <a:r>
+              <a:rPr lang="en-US" dirty="0"/>
+              <a:t>Check Isaac Computer Science: </a:t>
+            </a:r>
+            <a:r>
+              <a:rPr lang="en-US" sz="2200" dirty="0">
+                <a:hlinkClick r:id="rId3"/>
+              </a:rPr>
+              <a:t>https://isaaccomputerscience.org/topics/programming_concepts?examBoard=all&amp;stage=all</a:t>
+            </a:r>
+            <a:r>
+              <a:rPr lang="en-US" sz="2200" dirty="0"/>
+              <a:t> </a:t>
+            </a:r>
+          </a:p>
+          <a:p>
+            <a:r>
+              <a:rPr lang="en-US" dirty="0"/>
+              <a:t>Instructions / Basic Syntax</a:t>
+            </a:r>
+          </a:p>
+          <a:p>
+            <a:r>
+              <a:rPr lang="en-US" dirty="0"/>
+              <a:t>Data Types </a:t>
+            </a:r>
+          </a:p>
+          <a:p>
+            <a:pPr lvl="1"/>
+            <a:r>
+              <a:rPr lang="en-US" dirty="0"/>
+              <a:t>Classification of the type of data being stored or manipulated within a program. </a:t>
+            </a:r>
+          </a:p>
+          <a:p>
+            <a:pPr lvl="1"/>
+            <a:r>
+              <a:rPr lang="en-US" dirty="0"/>
+              <a:t>Data types are important because they determine the operations that can be performed on the data.</a:t>
+            </a:r>
+          </a:p>
+          <a:p>
+            <a:r>
+              <a:rPr lang="en-US" dirty="0"/>
+              <a:t>Variables</a:t>
+            </a:r>
+          </a:p>
+          <a:p>
+            <a:pPr lvl="1"/>
+            <a:r>
+              <a:rPr lang="en-US" dirty="0"/>
+              <a:t>Named container, held by the computer in a memory location. </a:t>
+            </a:r>
+          </a:p>
+          <a:p>
+            <a:pPr lvl="1"/>
+            <a:r>
+              <a:rPr lang="en-US" dirty="0"/>
+              <a:t>Has a unique identifier (name) that refers to a value.</a:t>
+            </a:r>
+          </a:p>
+          <a:p>
+            <a:r>
+              <a:rPr lang="en-US" dirty="0"/>
+              <a:t>Input / Output</a:t>
+            </a:r>
+          </a:p>
+        </p:txBody>
+      </p:sp>
+    </p:spTree>
+    <p:extLst>
+      <p:ext uri="{BB962C8B-B14F-4D97-AF65-F5344CB8AC3E}">
+        <p14:creationId xmlns:p14="http://schemas.microsoft.com/office/powerpoint/2010/main" val="68602542"/>
+      </p:ext>
+    </p:extLst>
+  </p:cSld>
+  <p:clrMapOvr>
+    <a:masterClrMapping/>
+  </p:clrMapOvr>
+</p:sld>
+</file>
+
+<file path=ppt/slides/slide26.xml><?xml version="1.0" encoding="utf-8"?>
+<p:sld xmlns:a="http://schemas.openxmlformats.org/drawingml/2006/main" xmlns:r="http://schemas.openxmlformats.org/officeDocument/2006/relationships" xmlns:p="http://schemas.openxmlformats.org/presentationml/2006/main">
+  <p:cSld>
+    <p:spTree>
+      <p:nvGrpSpPr>
+        <p:cNvPr id="1" name=""/>
+        <p:cNvGrpSpPr/>
+        <p:nvPr/>
+      </p:nvGrpSpPr>
+      <p:grpSpPr>
+        <a:xfrm>
+          <a:off x="0" y="0"/>
+          <a:ext cx="0" cy="0"/>
+          <a:chOff x="0" y="0"/>
+          <a:chExt cx="0" cy="0"/>
+        </a:xfrm>
+      </p:grpSpPr>
+      <p:sp>
+        <p:nvSpPr>
+          <p:cNvPr id="2" name="Title 1">
+            <a:extLst>
+              <a:ext uri="{FF2B5EF4-FFF2-40B4-BE49-F238E27FC236}">
+                <a16:creationId xmlns:a16="http://schemas.microsoft.com/office/drawing/2014/main" id="{90C75A3A-6F68-4B94-B969-47ADA48A2E17}"/>
+              </a:ext>
+            </a:extLst>
+          </p:cNvPr>
+          <p:cNvSpPr>
+            <a:spLocks noGrp="1"/>
+          </p:cNvSpPr>
+          <p:nvPr>
+            <p:ph type="title"/>
+          </p:nvPr>
+        </p:nvSpPr>
+        <p:spPr/>
+        <p:txBody>
+          <a:bodyPr/>
+          <a:lstStyle/>
+          <a:p>
+            <a:r>
+              <a:rPr lang="en-US" dirty="0"/>
+              <a:t>Key concepts in programming</a:t>
+            </a:r>
+            <a:endParaRPr lang="en-BE" dirty="0"/>
+          </a:p>
+        </p:txBody>
+      </p:sp>
+      <p:sp>
+        <p:nvSpPr>
+          <p:cNvPr id="3" name="Content Placeholder 2">
+            <a:extLst>
+              <a:ext uri="{FF2B5EF4-FFF2-40B4-BE49-F238E27FC236}">
+                <a16:creationId xmlns:a16="http://schemas.microsoft.com/office/drawing/2014/main" id="{03AE8799-851E-481B-9E3B-8593E5F6F6BB}"/>
+              </a:ext>
+            </a:extLst>
+          </p:cNvPr>
+          <p:cNvSpPr>
+            <a:spLocks noGrp="1"/>
+          </p:cNvSpPr>
+          <p:nvPr>
+            <p:ph idx="1"/>
+          </p:nvPr>
+        </p:nvSpPr>
+        <p:spPr/>
+        <p:txBody>
+          <a:bodyPr>
             <a:normAutofit fontScale="77500" lnSpcReduction="20000"/>
           </a:bodyPr>
           <a:lstStyle/>
@@ -17696,7 +18149,7 @@
 </p:sld>
 </file>
 
-<file path=ppt/slides/slide26.xml><?xml version="1.0" encoding="utf-8"?>
+<file path=ppt/slides/slide27.xml><?xml version="1.0" encoding="utf-8"?>
 <p:sld xmlns:a="http://schemas.openxmlformats.org/drawingml/2006/main" xmlns:r="http://schemas.openxmlformats.org/officeDocument/2006/relationships" xmlns:p="http://schemas.openxmlformats.org/presentationml/2006/main">
   <p:cSld>
     <p:spTree>
@@ -17792,7 +18245,9 @@
         </p:nvSpPr>
         <p:spPr/>
         <p:txBody>
-          <a:bodyPr/>
+          <a:bodyPr>
+            <a:normAutofit lnSpcReduction="10000"/>
+          </a:bodyPr>
           <a:lstStyle/>
           <a:p>
             <a:r>
@@ -17815,6 +18270,15 @@
             </a:r>
           </a:p>
           <a:p>
+            <a:pPr marL="457200" lvl="1" indent="0">
+              <a:buNone/>
+            </a:pPr>
+            <a:r>
+              <a:rPr lang="en-US" dirty="0"/>
+              <a:t>-&gt; Easy to spot and fix</a:t>
+            </a:r>
+          </a:p>
+          <a:p>
             <a:r>
               <a:rPr lang="en-US" dirty="0"/>
               <a:t>Runtime error</a:t>
@@ -17824,7 +18288,16 @@
             <a:pPr lvl="1"/>
             <a:r>
               <a:rPr lang="en-US" dirty="0"/>
-              <a:t>Usually due to some missing variables, modules,…</a:t>
+              <a:t>Usually due to some missing variables, modules, files, …</a:t>
+            </a:r>
+          </a:p>
+          <a:p>
+            <a:pPr marL="457200" lvl="1" indent="0">
+              <a:buNone/>
+            </a:pPr>
+            <a:r>
+              <a:rPr lang="en-US" dirty="0"/>
+              <a:t>-&gt; Easy to spot and fix</a:t>
             </a:r>
           </a:p>
           <a:p>
@@ -17844,11 +18317,11 @@
             <a:pPr lvl="1"/>
             <a:r>
               <a:rPr lang="nl-BE" dirty="0"/>
-              <a:t>Program is </a:t>
+              <a:t>Program runs, but </a:t>
             </a:r>
             <a:r>
               <a:rPr lang="nl-BE" dirty="0" err="1"/>
-              <a:t>not</a:t>
+              <a:t>produces</a:t>
             </a:r>
             <a:r>
               <a:rPr lang="nl-BE" dirty="0"/>
@@ -17856,25 +18329,58 @@
             </a:r>
             <a:r>
               <a:rPr lang="nl-BE" dirty="0" err="1"/>
-              <a:t>executing</a:t>
+              <a:t>undesireable</a:t>
             </a:r>
             <a:r>
               <a:rPr lang="nl-BE" dirty="0"/>
-              <a:t> as </a:t>
+              <a:t>/wrong/</a:t>
             </a:r>
             <a:r>
               <a:rPr lang="nl-BE" dirty="0" err="1"/>
-              <a:t>intended</a:t>
+              <a:t>meaningless</a:t>
             </a:r>
             <a:r>
               <a:rPr lang="nl-BE" dirty="0"/>
-              <a:t> / </a:t>
+              <a:t> </a:t>
             </a:r>
             <a:r>
               <a:rPr lang="nl-BE" dirty="0" err="1"/>
-              <a:t>expected</a:t>
+              <a:t>results</a:t>
             </a:r>
             <a:endParaRPr lang="nl-BE" dirty="0"/>
+          </a:p>
+          <a:p>
+            <a:pPr marL="457200" lvl="1" indent="0">
+              <a:buNone/>
+            </a:pPr>
+            <a:r>
+              <a:rPr lang="nl-BE" dirty="0"/>
+              <a:t>-&gt; </a:t>
+            </a:r>
+            <a:r>
+              <a:rPr lang="nl-BE" dirty="0" err="1"/>
+              <a:t>Difficult</a:t>
+            </a:r>
+            <a:r>
+              <a:rPr lang="nl-BE" dirty="0"/>
+              <a:t> </a:t>
+            </a:r>
+            <a:r>
+              <a:rPr lang="nl-BE" dirty="0" err="1"/>
+              <a:t>to</a:t>
+            </a:r>
+            <a:r>
+              <a:rPr lang="nl-BE" dirty="0"/>
+              <a:t> spot </a:t>
+            </a:r>
+            <a:r>
+              <a:rPr lang="nl-BE" dirty="0" err="1"/>
+              <a:t>and</a:t>
+            </a:r>
+            <a:r>
+              <a:rPr lang="nl-BE" dirty="0"/>
+              <a:t> fix!</a:t>
+            </a:r>
           </a:p>
           <a:p>
             <a:pPr lvl="1"/>
@@ -17895,7 +18401,7 @@
 </p:sld>
 </file>
 
-<file path=ppt/slides/slide27.xml><?xml version="1.0" encoding="utf-8"?>
+<file path=ppt/slides/slide28.xml><?xml version="1.0" encoding="utf-8"?>
 <p:sld xmlns:a="http://schemas.openxmlformats.org/drawingml/2006/main" xmlns:r="http://schemas.openxmlformats.org/officeDocument/2006/relationships" xmlns:p="http://schemas.openxmlformats.org/presentationml/2006/main">
   <p:cSld>
     <p:spTree>
@@ -17988,155 +18494,6 @@
     </mc:Choice>
     <mc:Fallback xmlns="">
       <p:transition spd="slow" advTm="33670"/>
-    </mc:Fallback>
-  </mc:AlternateContent>
-</p:sld>
-</file>
-
-<file path=ppt/slides/slide28.xml><?xml version="1.0" encoding="utf-8"?>
-<p:sld xmlns:a="http://schemas.openxmlformats.org/drawingml/2006/main" xmlns:r="http://schemas.openxmlformats.org/officeDocument/2006/relationships" xmlns:p="http://schemas.openxmlformats.org/presentationml/2006/main">
-  <p:cSld>
-    <p:spTree>
-      <p:nvGrpSpPr>
-        <p:cNvPr id="1" name=""/>
-        <p:cNvGrpSpPr/>
-        <p:nvPr/>
-      </p:nvGrpSpPr>
-      <p:grpSpPr>
-        <a:xfrm>
-          <a:off x="0" y="0"/>
-          <a:ext cx="0" cy="0"/>
-          <a:chOff x="0" y="0"/>
-          <a:chExt cx="0" cy="0"/>
-        </a:xfrm>
-      </p:grpSpPr>
-      <p:sp>
-        <p:nvSpPr>
-          <p:cNvPr id="2" name="Title 1"/>
-          <p:cNvSpPr>
-            <a:spLocks noGrp="1"/>
-          </p:cNvSpPr>
-          <p:nvPr>
-            <p:ph type="title"/>
-          </p:nvPr>
-        </p:nvSpPr>
-        <p:spPr/>
-        <p:txBody>
-          <a:bodyPr/>
-          <a:lstStyle/>
-          <a:p>
-            <a:r>
-              <a:rPr lang="en-US" dirty="0"/>
-              <a:t>Thank You</a:t>
-            </a:r>
-            <a:endParaRPr lang="nl-BE" dirty="0"/>
-          </a:p>
-        </p:txBody>
-      </p:sp>
-      <p:sp>
-        <p:nvSpPr>
-          <p:cNvPr id="3" name="Content Placeholder 2"/>
-          <p:cNvSpPr>
-            <a:spLocks noGrp="1"/>
-          </p:cNvSpPr>
-          <p:nvPr>
-            <p:ph idx="1"/>
-          </p:nvPr>
-        </p:nvSpPr>
-        <p:spPr/>
-        <p:txBody>
-          <a:bodyPr>
-            <a:normAutofit/>
-          </a:bodyPr>
-          <a:lstStyle/>
-          <a:p>
-            <a:r>
-              <a:rPr lang="nl-BE" dirty="0">
-                <a:hlinkClick r:id="rId3"/>
-              </a:rPr>
-              <a:t>https://github.com/gjbex/training-material/tree/master/Python</a:t>
-            </a:r>
-            <a:endParaRPr lang="en-US" i="1" dirty="0"/>
-          </a:p>
-          <a:p>
-            <a:r>
-              <a:rPr lang="en-US" i="1" dirty="0"/>
-              <a:t>Whirlwind Tour of Python </a:t>
-            </a:r>
-            <a:r>
-              <a:rPr lang="en-US" dirty="0"/>
-              <a:t>by Jake </a:t>
-            </a:r>
-            <a:r>
-              <a:rPr lang="en-US" dirty="0" err="1"/>
-              <a:t>VanderPlas</a:t>
-            </a:r>
-            <a:r>
-              <a:rPr lang="en-US" dirty="0"/>
-              <a:t> </a:t>
-            </a:r>
-            <a:r>
-              <a:rPr lang="es-ES" dirty="0">
-                <a:hlinkClick r:id="rId4"/>
-              </a:rPr>
-              <a:t>https://jakevdp.github.io/WhirlwindTourOfPython/</a:t>
-            </a:r>
-            <a:endParaRPr lang="es-ES" dirty="0"/>
-          </a:p>
-          <a:p>
-            <a:r>
-              <a:rPr lang="es-ES" dirty="0">
-                <a:hlinkClick r:id="rId5"/>
-              </a:rPr>
-              <a:t>https://www.cs.cornell.edu/courses/cs1110/2023fa/materials/python/</a:t>
-            </a:r>
-            <a:r>
-              <a:rPr lang="es-ES" dirty="0"/>
-              <a:t> </a:t>
-            </a:r>
-          </a:p>
-          <a:p>
-            <a:r>
-              <a:rPr lang="es-ES" dirty="0">
-                <a:hlinkClick r:id="rId6"/>
-              </a:rPr>
-              <a:t>https://fabienmaussion.info/scientific_programming/welcome.html</a:t>
-            </a:r>
-            <a:r>
-              <a:rPr lang="es-ES" dirty="0"/>
-              <a:t>  </a:t>
-            </a:r>
-          </a:p>
-          <a:p>
-            <a:r>
-              <a:rPr lang="es-ES" dirty="0">
-                <a:hlinkClick r:id="rId7"/>
-              </a:rPr>
-              <a:t>https://justinbois.github.io/bootcamp/</a:t>
-            </a:r>
-            <a:r>
-              <a:rPr lang="es-ES" dirty="0"/>
-              <a:t> </a:t>
-            </a:r>
-          </a:p>
-        </p:txBody>
-      </p:sp>
-    </p:spTree>
-    <p:extLst>
-      <p:ext uri="{BB962C8B-B14F-4D97-AF65-F5344CB8AC3E}">
-        <p14:creationId xmlns:p14="http://schemas.microsoft.com/office/powerpoint/2010/main" val="158258528"/>
-      </p:ext>
-    </p:extLst>
-  </p:cSld>
-  <p:clrMapOvr>
-    <a:masterClrMapping/>
-  </p:clrMapOvr>
-  <mc:AlternateContent xmlns:mc="http://schemas.openxmlformats.org/markup-compatibility/2006" xmlns:p14="http://schemas.microsoft.com/office/powerpoint/2010/main">
-    <mc:Choice Requires="p14">
-      <p:transition spd="slow" p14:dur="2000" advTm="57630"/>
-    </mc:Choice>
-    <mc:Fallback xmlns="">
-      <p:transition spd="slow" advTm="57630"/>
     </mc:Fallback>
   </mc:AlternateContent>
 </p:sld>
@@ -18176,7 +18533,7 @@
           <a:p>
             <a:r>
               <a:rPr lang="en-US" dirty="0"/>
-              <a:t>See also</a:t>
+              <a:t>Thank You</a:t>
             </a:r>
             <a:endParaRPr lang="nl-BE" dirty="0"/>
           </a:p>
@@ -18200,67 +18557,80 @@
           <a:lstStyle/>
           <a:p>
             <a:r>
-              <a:rPr lang="en-US" dirty="0">
-                <a:hlinkClick r:id="rId2"/>
-              </a:rPr>
-              <a:t>https://fangohr.github.io/teaching/python/book.html</a:t>
-            </a:r>
-            <a:r>
-              <a:rPr lang="en-US" dirty="0"/>
-              <a:t> </a:t>
-            </a:r>
-          </a:p>
-          <a:p>
-            <a:r>
               <a:rPr lang="nl-BE" dirty="0">
                 <a:hlinkClick r:id="rId3"/>
               </a:rPr>
-              <a:t>https://patrickwalls.github.io/mathematicalpython/</a:t>
-            </a:r>
-            <a:endParaRPr lang="nl-BE" dirty="0"/>
-          </a:p>
-          <a:p>
-            <a:r>
-              <a:rPr lang="nl-BE" dirty="0">
+              <a:t>https://github.com/gjbex/training-material/tree/master/Python</a:t>
+            </a:r>
+            <a:endParaRPr lang="en-US" i="1" dirty="0"/>
+          </a:p>
+          <a:p>
+            <a:r>
+              <a:rPr lang="en-US" i="1" dirty="0"/>
+              <a:t>Whirlwind Tour of Python </a:t>
+            </a:r>
+            <a:r>
+              <a:rPr lang="en-US" dirty="0"/>
+              <a:t>by Jake </a:t>
+            </a:r>
+            <a:r>
+              <a:rPr lang="en-US" dirty="0" err="1"/>
+              <a:t>VanderPlas</a:t>
+            </a:r>
+            <a:r>
+              <a:rPr lang="en-US" dirty="0"/>
+              <a:t> </a:t>
+            </a:r>
+            <a:r>
+              <a:rPr lang="es-ES" dirty="0">
                 <a:hlinkClick r:id="rId4"/>
               </a:rPr>
-              <a:t>https://sites.duke.edu/compsci_101l_001_sp24/</a:t>
-            </a:r>
-            <a:endParaRPr lang="nl-BE" dirty="0"/>
-          </a:p>
-          <a:p>
-            <a:r>
-              <a:rPr lang="nl-BE" dirty="0">
+              <a:t>https://jakevdp.github.io/WhirlwindTourOfPython/</a:t>
+            </a:r>
+            <a:endParaRPr lang="es-ES" dirty="0"/>
+          </a:p>
+          <a:p>
+            <a:r>
+              <a:rPr lang="es-ES" dirty="0">
                 <a:hlinkClick r:id="rId5"/>
               </a:rPr>
-              <a:t>https://github.com/parrt/msan501</a:t>
-            </a:r>
-            <a:r>
-              <a:rPr lang="nl-BE" dirty="0"/>
+              <a:t>https://www.cs.cornell.edu/courses/cs1110/2023fa/materials/python/</a:t>
+            </a:r>
+            <a:r>
+              <a:rPr lang="es-ES" dirty="0"/>
               <a:t> </a:t>
             </a:r>
           </a:p>
           <a:p>
             <a:r>
-              <a:rPr lang="nl-BE" dirty="0">
+              <a:rPr lang="es-ES" dirty="0">
                 <a:hlinkClick r:id="rId6"/>
               </a:rPr>
-              <a:t>https://docs.python-guide.org/intro/learning/</a:t>
-            </a:r>
-            <a:r>
-              <a:rPr lang="nl-BE" dirty="0"/>
+              <a:t>https://fabienmaussion.info/scientific_programming/welcome.html</a:t>
+            </a:r>
+            <a:r>
+              <a:rPr lang="es-ES" dirty="0"/>
+              <a:t>  </a:t>
+            </a:r>
+          </a:p>
+          <a:p>
+            <a:r>
+              <a:rPr lang="es-ES" dirty="0">
+                <a:hlinkClick r:id="rId7"/>
+              </a:rPr>
+              <a:t>https://justinbois.github.io/bootcamp/</a:t>
+            </a:r>
+            <a:r>
+              <a:rPr lang="es-ES" dirty="0"/>
               <a:t> </a:t>
             </a:r>
-          </a:p>
-          <a:p>
-            <a:endParaRPr lang="nl-BE" dirty="0"/>
           </a:p>
         </p:txBody>
       </p:sp>
     </p:spTree>
     <p:extLst>
       <p:ext uri="{BB962C8B-B14F-4D97-AF65-F5344CB8AC3E}">
-        <p14:creationId xmlns:p14="http://schemas.microsoft.com/office/powerpoint/2010/main" val="2849695021"/>
+        <p14:creationId xmlns:p14="http://schemas.microsoft.com/office/powerpoint/2010/main" val="158258528"/>
       </p:ext>
     </p:extLst>
   </p:cSld>
@@ -18269,10 +18639,10 @@
   </p:clrMapOvr>
   <mc:AlternateContent xmlns:mc="http://schemas.openxmlformats.org/markup-compatibility/2006" xmlns:p14="http://schemas.microsoft.com/office/powerpoint/2010/main">
     <mc:Choice Requires="p14">
-      <p:transition spd="slow" p14:dur="2000" advTm="27794"/>
+      <p:transition spd="slow" p14:dur="2000" advTm="57630"/>
     </mc:Choice>
     <mc:Fallback xmlns="">
-      <p:transition spd="slow" advTm="27794"/>
+      <p:transition spd="slow" advTm="57630"/>
     </mc:Fallback>
   </mc:AlternateContent>
 </p:sld>
@@ -18407,6 +18777,142 @@
           <a:p>
             <a:r>
               <a:rPr lang="en-US" dirty="0"/>
+              <a:t>See also</a:t>
+            </a:r>
+            <a:endParaRPr lang="nl-BE" dirty="0"/>
+          </a:p>
+        </p:txBody>
+      </p:sp>
+      <p:sp>
+        <p:nvSpPr>
+          <p:cNvPr id="3" name="Content Placeholder 2"/>
+          <p:cNvSpPr>
+            <a:spLocks noGrp="1"/>
+          </p:cNvSpPr>
+          <p:nvPr>
+            <p:ph idx="1"/>
+          </p:nvPr>
+        </p:nvSpPr>
+        <p:spPr/>
+        <p:txBody>
+          <a:bodyPr>
+            <a:normAutofit/>
+          </a:bodyPr>
+          <a:lstStyle/>
+          <a:p>
+            <a:r>
+              <a:rPr lang="en-US" dirty="0">
+                <a:hlinkClick r:id="rId2"/>
+              </a:rPr>
+              <a:t>https://fangohr.github.io/teaching/python/book.html</a:t>
+            </a:r>
+            <a:r>
+              <a:rPr lang="en-US" dirty="0"/>
+              <a:t> </a:t>
+            </a:r>
+          </a:p>
+          <a:p>
+            <a:r>
+              <a:rPr lang="nl-BE" dirty="0">
+                <a:hlinkClick r:id="rId3"/>
+              </a:rPr>
+              <a:t>https://patrickwalls.github.io/mathematicalpython/</a:t>
+            </a:r>
+            <a:endParaRPr lang="nl-BE" dirty="0"/>
+          </a:p>
+          <a:p>
+            <a:r>
+              <a:rPr lang="nl-BE" dirty="0">
+                <a:hlinkClick r:id="rId4"/>
+              </a:rPr>
+              <a:t>https://sites.duke.edu/compsci_101l_001_sp24/</a:t>
+            </a:r>
+            <a:endParaRPr lang="nl-BE" dirty="0"/>
+          </a:p>
+          <a:p>
+            <a:r>
+              <a:rPr lang="nl-BE" dirty="0">
+                <a:hlinkClick r:id="rId5"/>
+              </a:rPr>
+              <a:t>https://github.com/parrt/msan501</a:t>
+            </a:r>
+            <a:r>
+              <a:rPr lang="nl-BE" dirty="0"/>
+              <a:t> </a:t>
+            </a:r>
+          </a:p>
+          <a:p>
+            <a:r>
+              <a:rPr lang="nl-BE" dirty="0">
+                <a:hlinkClick r:id="rId6"/>
+              </a:rPr>
+              <a:t>https://docs.python-guide.org/intro/learning/</a:t>
+            </a:r>
+            <a:r>
+              <a:rPr lang="nl-BE" dirty="0"/>
+              <a:t> </a:t>
+            </a:r>
+          </a:p>
+          <a:p>
+            <a:endParaRPr lang="nl-BE" dirty="0"/>
+          </a:p>
+        </p:txBody>
+      </p:sp>
+    </p:spTree>
+    <p:extLst>
+      <p:ext uri="{BB962C8B-B14F-4D97-AF65-F5344CB8AC3E}">
+        <p14:creationId xmlns:p14="http://schemas.microsoft.com/office/powerpoint/2010/main" val="2849695021"/>
+      </p:ext>
+    </p:extLst>
+  </p:cSld>
+  <p:clrMapOvr>
+    <a:masterClrMapping/>
+  </p:clrMapOvr>
+  <mc:AlternateContent xmlns:mc="http://schemas.openxmlformats.org/markup-compatibility/2006" xmlns:p14="http://schemas.microsoft.com/office/powerpoint/2010/main">
+    <mc:Choice Requires="p14">
+      <p:transition spd="slow" p14:dur="2000" advTm="27794"/>
+    </mc:Choice>
+    <mc:Fallback xmlns="">
+      <p:transition spd="slow" advTm="27794"/>
+    </mc:Fallback>
+  </mc:AlternateContent>
+</p:sld>
+</file>
+
+<file path=ppt/slides/slide31.xml><?xml version="1.0" encoding="utf-8"?>
+<p:sld xmlns:a="http://schemas.openxmlformats.org/drawingml/2006/main" xmlns:r="http://schemas.openxmlformats.org/officeDocument/2006/relationships" xmlns:p="http://schemas.openxmlformats.org/presentationml/2006/main">
+  <p:cSld>
+    <p:spTree>
+      <p:nvGrpSpPr>
+        <p:cNvPr id="1" name=""/>
+        <p:cNvGrpSpPr/>
+        <p:nvPr/>
+      </p:nvGrpSpPr>
+      <p:grpSpPr>
+        <a:xfrm>
+          <a:off x="0" y="0"/>
+          <a:ext cx="0" cy="0"/>
+          <a:chOff x="0" y="0"/>
+          <a:chExt cx="0" cy="0"/>
+        </a:xfrm>
+      </p:grpSpPr>
+      <p:sp>
+        <p:nvSpPr>
+          <p:cNvPr id="2" name="Title 1"/>
+          <p:cNvSpPr>
+            <a:spLocks noGrp="1"/>
+          </p:cNvSpPr>
+          <p:nvPr>
+            <p:ph type="title"/>
+          </p:nvPr>
+        </p:nvSpPr>
+        <p:spPr/>
+        <p:txBody>
+          <a:bodyPr/>
+          <a:lstStyle/>
+          <a:p>
+            <a:r>
+              <a:rPr lang="en-US" dirty="0"/>
               <a:t>Tutorials</a:t>
             </a:r>
             <a:endParaRPr lang="nl-BE" dirty="0"/>
@@ -18434,58 +18940,63 @@
               </a:rPr>
               <a:t>https://www.python.org/about/gettingstarted/</a:t>
             </a:r>
-            <a:r>
-              <a:rPr lang="nl-BE" dirty="0"/>
-              <a:t> </a:t>
-            </a:r>
+            <a:endParaRPr lang="nl-BE" dirty="0"/>
           </a:p>
           <a:p>
             <a:r>
               <a:rPr lang="nl-BE" dirty="0">
                 <a:hlinkClick r:id="rId3"/>
               </a:rPr>
+              <a:t>https://exercism.org/tracks/python</a:t>
+            </a:r>
+            <a:endParaRPr lang="nl-BE" dirty="0"/>
+          </a:p>
+          <a:p>
+            <a:r>
+              <a:rPr lang="nl-BE" dirty="0">
+                <a:hlinkClick r:id="rId4"/>
+              </a:rPr>
               <a:t>https://realpython.com/</a:t>
             </a:r>
             <a:r>
               <a:rPr lang="nl-BE" dirty="0"/>
               <a:t> </a:t>
             </a:r>
-          </a:p>
-          <a:p>
-            <a:r>
-              <a:rPr lang="nl-BE">
-                <a:hlinkClick r:id="rId4"/>
-              </a:rPr>
-              <a:t>https://realpython.com/matlab-vs-python/</a:t>
-            </a:r>
-            <a:r>
-              <a:rPr lang="nl-BE"/>
-              <a:t> </a:t>
-            </a:r>
-            <a:endParaRPr lang="nl-BE" dirty="0"/>
           </a:p>
           <a:p>
             <a:r>
               <a:rPr lang="nl-BE" dirty="0">
                 <a:hlinkClick r:id="rId5"/>
               </a:rPr>
-              <a:t>https://www.learnpython.org/</a:t>
-            </a:r>
-            <a:endParaRPr lang="nl-BE" dirty="0"/>
-          </a:p>
-          <a:p>
-            <a:endParaRPr lang="en-US" dirty="0"/>
-          </a:p>
-          <a:p>
-            <a:r>
-              <a:rPr lang="en-US" dirty="0"/>
-              <a:t>Cheat sheets</a:t>
+              <a:t>https://realpython.com/matlab-vs-python/</a:t>
+            </a:r>
+            <a:r>
+              <a:rPr lang="nl-BE" dirty="0"/>
+              <a:t> </a:t>
             </a:r>
           </a:p>
           <a:p>
             <a:r>
               <a:rPr lang="nl-BE" dirty="0">
                 <a:hlinkClick r:id="rId6"/>
+              </a:rPr>
+              <a:t>https://www.learnpython.org/</a:t>
+            </a:r>
+            <a:endParaRPr lang="nl-BE" dirty="0"/>
+          </a:p>
+          <a:p>
+            <a:endParaRPr lang="en-US" dirty="0"/>
+          </a:p>
+          <a:p>
+            <a:r>
+              <a:rPr lang="en-US" dirty="0"/>
+              <a:t>Cheat sheets</a:t>
+            </a:r>
+          </a:p>
+          <a:p>
+            <a:r>
+              <a:rPr lang="nl-BE" dirty="0">
+                <a:hlinkClick r:id="rId7"/>
               </a:rPr>
               <a:t>https://www.datacamp.com/community/data-science-cheatsheets</a:t>
             </a:r>
@@ -18517,7 +19028,7 @@
 </p:sld>
 </file>
 
-<file path=ppt/slides/slide31.xml><?xml version="1.0" encoding="utf-8"?>
+<file path=ppt/slides/slide32.xml><?xml version="1.0" encoding="utf-8"?>
 <p:sld xmlns:a="http://schemas.openxmlformats.org/drawingml/2006/main" xmlns:r="http://schemas.openxmlformats.org/officeDocument/2006/relationships" xmlns:p="http://schemas.openxmlformats.org/presentationml/2006/main">
   <p:cSld>
     <p:spTree>
@@ -18604,7 +19115,7 @@
 </p:sld>
 </file>
 
-<file path=ppt/slides/slide32.xml><?xml version="1.0" encoding="utf-8"?>
+<file path=ppt/slides/slide33.xml><?xml version="1.0" encoding="utf-8"?>
 <p:sld xmlns:a="http://schemas.openxmlformats.org/drawingml/2006/main" xmlns:r="http://schemas.openxmlformats.org/officeDocument/2006/relationships" xmlns:p="http://schemas.openxmlformats.org/presentationml/2006/main" show="0">
   <p:cSld>
     <p:spTree>
@@ -19482,7 +19993,7 @@
 </p:sld>
 </file>
 
-<file path=ppt/slides/slide33.xml><?xml version="1.0" encoding="utf-8"?>
+<file path=ppt/slides/slide34.xml><?xml version="1.0" encoding="utf-8"?>
 <p:sld xmlns:a="http://schemas.openxmlformats.org/drawingml/2006/main" xmlns:r="http://schemas.openxmlformats.org/officeDocument/2006/relationships" xmlns:p="http://schemas.openxmlformats.org/presentationml/2006/main" show="0">
   <p:cSld>
     <p:spTree>
@@ -19589,7 +20100,7 @@
 </p:sld>
 </file>
 
-<file path=ppt/slides/slide34.xml><?xml version="1.0" encoding="utf-8"?>
+<file path=ppt/slides/slide35.xml><?xml version="1.0" encoding="utf-8"?>
 <p:sld xmlns:a="http://schemas.openxmlformats.org/drawingml/2006/main" xmlns:r="http://schemas.openxmlformats.org/officeDocument/2006/relationships" xmlns:p="http://schemas.openxmlformats.org/presentationml/2006/main">
   <p:cSld>
     <p:spTree>
@@ -19642,10 +20153,13 @@
         <p:spPr/>
         <p:txBody>
           <a:bodyPr>
-            <a:normAutofit lnSpcReduction="10000"/>
+            <a:normAutofit/>
           </a:bodyPr>
           <a:lstStyle/>
           <a:p>
+            <a:pPr marL="0" indent="0">
+              <a:buNone/>
+            </a:pPr>
             <a:r>
               <a:rPr lang="en-US" dirty="0"/>
               <a:t>From </a:t>
@@ -19658,27 +20172,20 @@
             </a:r>
             <a:r>
               <a:rPr lang="en-US" dirty="0"/>
-              <a:t>: "Python is an interpreted, object-oriented, high-level programming language with dynamic semantics. Its high-level built in data structures, combined with dynamic typing and dynamic binding, make it very attractive for Rapid Application Development, as well as for use as a scripting or glue language to connect existing components together. Python's simple, easy to learn syntax emphasizes readability and therefore reduces the cost of program maintenance."</a:t>
-            </a:r>
-          </a:p>
-          <a:p>
-            <a:r>
-              <a:rPr lang="en-US" dirty="0"/>
-              <a:t>Python is a general purpose programming language used for a huge variety of purposes. It's user community is growing rapidly! (</a:t>
-            </a:r>
-            <a:r>
-              <a:rPr lang="en-US" dirty="0">
-                <a:hlinkClick r:id="rId3"/>
-              </a:rPr>
-              <a:t>https://stackoverflow.blog/2017/09/06/incredible-growth-python/</a:t>
-            </a:r>
-            <a:r>
-              <a:rPr lang="en-US" dirty="0"/>
-              <a:t>)</a:t>
-            </a:r>
-          </a:p>
-          <a:p>
-            <a:endParaRPr lang="nl-BE" dirty="0"/>
+              <a:t>: </a:t>
+            </a:r>
+          </a:p>
+          <a:p>
+            <a:endParaRPr lang="en-US" dirty="0"/>
+          </a:p>
+          <a:p>
+            <a:pPr marL="0" indent="0">
+              <a:buNone/>
+            </a:pPr>
+            <a:r>
+              <a:rPr lang="en-US" dirty="0"/>
+              <a:t>"Python is an interpreted, object-oriented, high-level programming language with dynamic semantics. Its high-level built in data structures, combined with dynamic typing and dynamic binding, make it very attractive for Rapid Application Development, as well as for use as a scripting or glue language to connect existing components together. Python's simple, easy to learn syntax emphasizes readability and therefore reduces the cost of program maintenance."</a:t>
+            </a:r>
           </a:p>
         </p:txBody>
       </p:sp>
@@ -19703,7 +20210,7 @@
 </p:sld>
 </file>
 
-<file path=ppt/slides/slide35.xml><?xml version="1.0" encoding="utf-8"?>
+<file path=ppt/slides/slide36.xml><?xml version="1.0" encoding="utf-8"?>
 <p:sld xmlns:a="http://schemas.openxmlformats.org/drawingml/2006/main" xmlns:r="http://schemas.openxmlformats.org/officeDocument/2006/relationships" xmlns:p="http://schemas.openxmlformats.org/presentationml/2006/main" show="0">
   <p:cSld>
     <p:spTree>
@@ -19859,7 +20366,7 @@
 </p:sld>
 </file>
 
-<file path=ppt/slides/slide36.xml><?xml version="1.0" encoding="utf-8"?>
+<file path=ppt/slides/slide37.xml><?xml version="1.0" encoding="utf-8"?>
 <p:sld xmlns:a="http://schemas.openxmlformats.org/drawingml/2006/main" xmlns:r="http://schemas.openxmlformats.org/officeDocument/2006/relationships" xmlns:p="http://schemas.openxmlformats.org/presentationml/2006/main">
   <p:cSld>
     <p:spTree>
@@ -20301,7 +20808,7 @@
 </p:sld>
 </file>
 
-<file path=ppt/slides/slide37.xml><?xml version="1.0" encoding="utf-8"?>
+<file path=ppt/slides/slide38.xml><?xml version="1.0" encoding="utf-8"?>
 <p:sld xmlns:a="http://schemas.openxmlformats.org/drawingml/2006/main" xmlns:r="http://schemas.openxmlformats.org/officeDocument/2006/relationships" xmlns:p="http://schemas.openxmlformats.org/presentationml/2006/main">
   <p:cSld>
     <p:spTree>
@@ -20494,7 +21001,7 @@
 </p:sld>
 </file>
 
-<file path=ppt/slides/slide38.xml><?xml version="1.0" encoding="utf-8"?>
+<file path=ppt/slides/slide39.xml><?xml version="1.0" encoding="utf-8"?>
 <p:sld xmlns:a="http://schemas.openxmlformats.org/drawingml/2006/main" xmlns:r="http://schemas.openxmlformats.org/officeDocument/2006/relationships" xmlns:p="http://schemas.openxmlformats.org/presentationml/2006/main" show="0">
   <p:cSld>
     <p:spTree>
@@ -20788,8 +21295,178 @@
 </p:sld>
 </file>
 
-<file path=ppt/slides/slide39.xml><?xml version="1.0" encoding="utf-8"?>
+<file path=ppt/slides/slide4.xml><?xml version="1.0" encoding="utf-8"?>
 <p:sld xmlns:a="http://schemas.openxmlformats.org/drawingml/2006/main" xmlns:r="http://schemas.openxmlformats.org/officeDocument/2006/relationships" xmlns:p="http://schemas.openxmlformats.org/presentationml/2006/main">
+  <p:cSld>
+    <p:spTree>
+      <p:nvGrpSpPr>
+        <p:cNvPr id="1" name=""/>
+        <p:cNvGrpSpPr/>
+        <p:nvPr/>
+      </p:nvGrpSpPr>
+      <p:grpSpPr>
+        <a:xfrm>
+          <a:off x="0" y="0"/>
+          <a:ext cx="0" cy="0"/>
+          <a:chOff x="0" y="0"/>
+          <a:chExt cx="0" cy="0"/>
+        </a:xfrm>
+      </p:grpSpPr>
+      <p:sp>
+        <p:nvSpPr>
+          <p:cNvPr id="4" name="Title 3">
+            <a:extLst>
+              <a:ext uri="{FF2B5EF4-FFF2-40B4-BE49-F238E27FC236}">
+                <a16:creationId xmlns:a16="http://schemas.microsoft.com/office/drawing/2014/main" id="{23105F68-6AC2-A9AC-5992-A71353D93A8D}"/>
+              </a:ext>
+            </a:extLst>
+          </p:cNvPr>
+          <p:cNvSpPr>
+            <a:spLocks noGrp="1"/>
+          </p:cNvSpPr>
+          <p:nvPr>
+            <p:ph type="title"/>
+          </p:nvPr>
+        </p:nvSpPr>
+        <p:spPr/>
+        <p:txBody>
+          <a:bodyPr/>
+          <a:lstStyle/>
+          <a:p>
+            <a:r>
+              <a:rPr lang="nl-BE" dirty="0"/>
+              <a:t>Programming </a:t>
+            </a:r>
+            <a:r>
+              <a:rPr lang="nl-BE" dirty="0" err="1"/>
+              <a:t>with</a:t>
+            </a:r>
+            <a:r>
+              <a:rPr lang="nl-BE" dirty="0"/>
+              <a:t> Python: </a:t>
+            </a:r>
+            <a:r>
+              <a:rPr lang="nl-BE" dirty="0" err="1"/>
+              <a:t>ingredients</a:t>
+            </a:r>
+            <a:endParaRPr lang="nl-BE" dirty="0"/>
+          </a:p>
+        </p:txBody>
+      </p:sp>
+      <p:sp>
+        <p:nvSpPr>
+          <p:cNvPr id="5" name="Content Placeholder 4">
+            <a:extLst>
+              <a:ext uri="{FF2B5EF4-FFF2-40B4-BE49-F238E27FC236}">
+                <a16:creationId xmlns:a16="http://schemas.microsoft.com/office/drawing/2014/main" id="{28B150F4-5E45-EA56-B2C4-FAFE80B08060}"/>
+              </a:ext>
+            </a:extLst>
+          </p:cNvPr>
+          <p:cNvSpPr>
+            <a:spLocks noGrp="1"/>
+          </p:cNvSpPr>
+          <p:nvPr>
+            <p:ph idx="1"/>
+          </p:nvPr>
+        </p:nvSpPr>
+        <p:spPr/>
+        <p:txBody>
+          <a:bodyPr>
+            <a:normAutofit fontScale="85000" lnSpcReduction="20000"/>
+          </a:bodyPr>
+          <a:lstStyle/>
+          <a:p>
+            <a:r>
+              <a:rPr lang="en-US" b="1" dirty="0"/>
+              <a:t>Python Interpreter</a:t>
+            </a:r>
+            <a:r>
+              <a:rPr lang="en-US" dirty="0"/>
+              <a:t>:  the actual program that reads and executes the Python code you write. </a:t>
+            </a:r>
+          </a:p>
+          <a:p>
+            <a:r>
+              <a:rPr lang="en-US" b="1" dirty="0"/>
+              <a:t>Text Editor or Integrated Development Environment </a:t>
+            </a:r>
+            <a:r>
+              <a:rPr lang="en-US" dirty="0"/>
+              <a:t>(IDE): where you write Python code. </a:t>
+            </a:r>
+          </a:p>
+          <a:p>
+            <a:r>
+              <a:rPr lang="en-US" dirty="0"/>
+              <a:t>Basic Understanding of </a:t>
+            </a:r>
+            <a:r>
+              <a:rPr lang="en-US" b="1" dirty="0"/>
+              <a:t>Python Syntax</a:t>
+            </a:r>
+            <a:r>
+              <a:rPr lang="en-US" dirty="0"/>
+              <a:t>: includes knowledge of Python's data types, control flow structures, and functions.</a:t>
+            </a:r>
+          </a:p>
+          <a:p>
+            <a:r>
+              <a:rPr lang="en-US" b="1" dirty="0"/>
+              <a:t>Knowledge of Python Libraries</a:t>
+            </a:r>
+            <a:r>
+              <a:rPr lang="en-US" dirty="0"/>
+              <a:t>:  Python libraries are collections of functions and methods that allow to perform many actions without writing your own code. </a:t>
+            </a:r>
+          </a:p>
+          <a:p>
+            <a:r>
+              <a:rPr lang="en-US" b="1" dirty="0"/>
+              <a:t>Problem Solving Skills</a:t>
+            </a:r>
+            <a:r>
+              <a:rPr lang="en-US" dirty="0"/>
+              <a:t>: Programming is all about solving problems. Break down complex problems into smaller, more manageable parts.</a:t>
+            </a:r>
+          </a:p>
+          <a:p>
+            <a:r>
+              <a:rPr lang="en-US" b="1" dirty="0"/>
+              <a:t>Patience and Persistence</a:t>
+            </a:r>
+            <a:r>
+              <a:rPr lang="en-US" dirty="0"/>
+              <a:t>: you will encounter errors and bugs, and things won't work as expected. Debug your code and keep trying until you get it right.</a:t>
+            </a:r>
+          </a:p>
+          <a:p>
+            <a:r>
+              <a:rPr lang="en-US" b="1" dirty="0"/>
+              <a:t>Just do it</a:t>
+            </a:r>
+            <a:r>
+              <a:rPr lang="en-US" dirty="0"/>
+              <a:t>: the best way to learn Python programming is by doing. </a:t>
+            </a:r>
+            <a:endParaRPr lang="nl-BE" dirty="0"/>
+          </a:p>
+        </p:txBody>
+      </p:sp>
+    </p:spTree>
+    <p:extLst>
+      <p:ext uri="{BB962C8B-B14F-4D97-AF65-F5344CB8AC3E}">
+        <p14:creationId xmlns:p14="http://schemas.microsoft.com/office/powerpoint/2010/main" val="2137659803"/>
+      </p:ext>
+    </p:extLst>
+  </p:cSld>
+  <p:clrMapOvr>
+    <a:masterClrMapping/>
+  </p:clrMapOvr>
+</p:sld>
+</file>
+
+<file path=ppt/slides/slide40.xml><?xml version="1.0" encoding="utf-8"?>
+<p:sld xmlns:a="http://schemas.openxmlformats.org/drawingml/2006/main" xmlns:r="http://schemas.openxmlformats.org/officeDocument/2006/relationships" xmlns:p="http://schemas.openxmlformats.org/presentationml/2006/main" show="0">
   <p:cSld>
     <p:spTree>
       <p:nvGrpSpPr>
@@ -21127,177 +21804,7 @@
 </p:sld>
 </file>
 
-<file path=ppt/slides/slide4.xml><?xml version="1.0" encoding="utf-8"?>
-<p:sld xmlns:a="http://schemas.openxmlformats.org/drawingml/2006/main" xmlns:r="http://schemas.openxmlformats.org/officeDocument/2006/relationships" xmlns:p="http://schemas.openxmlformats.org/presentationml/2006/main">
-  <p:cSld>
-    <p:spTree>
-      <p:nvGrpSpPr>
-        <p:cNvPr id="1" name=""/>
-        <p:cNvGrpSpPr/>
-        <p:nvPr/>
-      </p:nvGrpSpPr>
-      <p:grpSpPr>
-        <a:xfrm>
-          <a:off x="0" y="0"/>
-          <a:ext cx="0" cy="0"/>
-          <a:chOff x="0" y="0"/>
-          <a:chExt cx="0" cy="0"/>
-        </a:xfrm>
-      </p:grpSpPr>
-      <p:sp>
-        <p:nvSpPr>
-          <p:cNvPr id="4" name="Title 3">
-            <a:extLst>
-              <a:ext uri="{FF2B5EF4-FFF2-40B4-BE49-F238E27FC236}">
-                <a16:creationId xmlns:a16="http://schemas.microsoft.com/office/drawing/2014/main" id="{23105F68-6AC2-A9AC-5992-A71353D93A8D}"/>
-              </a:ext>
-            </a:extLst>
-          </p:cNvPr>
-          <p:cNvSpPr>
-            <a:spLocks noGrp="1"/>
-          </p:cNvSpPr>
-          <p:nvPr>
-            <p:ph type="title"/>
-          </p:nvPr>
-        </p:nvSpPr>
-        <p:spPr/>
-        <p:txBody>
-          <a:bodyPr/>
-          <a:lstStyle/>
-          <a:p>
-            <a:r>
-              <a:rPr lang="nl-BE" dirty="0"/>
-              <a:t>Programming </a:t>
-            </a:r>
-            <a:r>
-              <a:rPr lang="nl-BE" dirty="0" err="1"/>
-              <a:t>with</a:t>
-            </a:r>
-            <a:r>
-              <a:rPr lang="nl-BE" dirty="0"/>
-              <a:t> Python: </a:t>
-            </a:r>
-            <a:r>
-              <a:rPr lang="nl-BE" dirty="0" err="1"/>
-              <a:t>ingredients</a:t>
-            </a:r>
-            <a:endParaRPr lang="nl-BE" dirty="0"/>
-          </a:p>
-        </p:txBody>
-      </p:sp>
-      <p:sp>
-        <p:nvSpPr>
-          <p:cNvPr id="5" name="Content Placeholder 4">
-            <a:extLst>
-              <a:ext uri="{FF2B5EF4-FFF2-40B4-BE49-F238E27FC236}">
-                <a16:creationId xmlns:a16="http://schemas.microsoft.com/office/drawing/2014/main" id="{28B150F4-5E45-EA56-B2C4-FAFE80B08060}"/>
-              </a:ext>
-            </a:extLst>
-          </p:cNvPr>
-          <p:cNvSpPr>
-            <a:spLocks noGrp="1"/>
-          </p:cNvSpPr>
-          <p:nvPr>
-            <p:ph idx="1"/>
-          </p:nvPr>
-        </p:nvSpPr>
-        <p:spPr/>
-        <p:txBody>
-          <a:bodyPr>
-            <a:normAutofit fontScale="85000" lnSpcReduction="20000"/>
-          </a:bodyPr>
-          <a:lstStyle/>
-          <a:p>
-            <a:r>
-              <a:rPr lang="en-US" b="1" dirty="0"/>
-              <a:t>Python Interpreter</a:t>
-            </a:r>
-            <a:r>
-              <a:rPr lang="en-US" dirty="0"/>
-              <a:t>:  the actual program that reads and executes the Python code you write. </a:t>
-            </a:r>
-          </a:p>
-          <a:p>
-            <a:r>
-              <a:rPr lang="en-US" b="1" dirty="0"/>
-              <a:t>Text Editor or Integrated Development Environment </a:t>
-            </a:r>
-            <a:r>
-              <a:rPr lang="en-US" dirty="0"/>
-              <a:t>(IDE): where you write Python code. </a:t>
-            </a:r>
-          </a:p>
-          <a:p>
-            <a:r>
-              <a:rPr lang="en-US" dirty="0"/>
-              <a:t>Basic Understanding of </a:t>
-            </a:r>
-            <a:r>
-              <a:rPr lang="en-US" b="1" dirty="0"/>
-              <a:t>Python Syntax</a:t>
-            </a:r>
-            <a:r>
-              <a:rPr lang="en-US" dirty="0"/>
-              <a:t>: includes knowledge of Python's data types, control flow structures, and functions.</a:t>
-            </a:r>
-          </a:p>
-          <a:p>
-            <a:r>
-              <a:rPr lang="en-US" b="1" dirty="0"/>
-              <a:t>Knowledge of Python Libraries</a:t>
-            </a:r>
-            <a:r>
-              <a:rPr lang="en-US" dirty="0"/>
-              <a:t>:  Python libraries are collections of functions and methods that allow to perform many actions without writing your own code. </a:t>
-            </a:r>
-          </a:p>
-          <a:p>
-            <a:r>
-              <a:rPr lang="en-US" b="1" dirty="0"/>
-              <a:t>Problem Solving Skills</a:t>
-            </a:r>
-            <a:r>
-              <a:rPr lang="en-US" dirty="0"/>
-              <a:t>: Programming is all about solving problems. Break down complex problems into smaller, more manageable parts.</a:t>
-            </a:r>
-          </a:p>
-          <a:p>
-            <a:r>
-              <a:rPr lang="en-US" b="1" dirty="0"/>
-              <a:t>Patience and Persistence</a:t>
-            </a:r>
-            <a:r>
-              <a:rPr lang="en-US" dirty="0"/>
-              <a:t>: you will encounter errors and bugs, and things won't work as expected. Debug your code and keep trying until you get it right.</a:t>
-            </a:r>
-          </a:p>
-          <a:p>
-            <a:r>
-              <a:rPr lang="en-US" b="1" dirty="0"/>
-              <a:t>Just do it</a:t>
-            </a:r>
-            <a:r>
-              <a:rPr lang="en-US" dirty="0"/>
-              <a:t>: the best way to learn Python programming is by doing. </a:t>
-            </a:r>
-            <a:endParaRPr lang="nl-BE" dirty="0"/>
-          </a:p>
-        </p:txBody>
-      </p:sp>
-    </p:spTree>
-    <p:extLst>
-      <p:ext uri="{BB962C8B-B14F-4D97-AF65-F5344CB8AC3E}">
-        <p14:creationId xmlns:p14="http://schemas.microsoft.com/office/powerpoint/2010/main" val="2137659803"/>
-      </p:ext>
-    </p:extLst>
-  </p:cSld>
-  <p:clrMapOvr>
-    <a:masterClrMapping/>
-  </p:clrMapOvr>
-</p:sld>
-</file>
-
-<file path=ppt/slides/slide40.xml><?xml version="1.0" encoding="utf-8"?>
+<file path=ppt/slides/slide41.xml><?xml version="1.0" encoding="utf-8"?>
 <p:sld xmlns:a="http://schemas.openxmlformats.org/drawingml/2006/main" xmlns:r="http://schemas.openxmlformats.org/officeDocument/2006/relationships" xmlns:p="http://schemas.openxmlformats.org/presentationml/2006/main">
   <p:cSld>
     <p:spTree>
@@ -21493,7 +22000,7 @@
 </p:sld>
 </file>
 
-<file path=ppt/slides/slide41.xml><?xml version="1.0" encoding="utf-8"?>
+<file path=ppt/slides/slide42.xml><?xml version="1.0" encoding="utf-8"?>
 <p:sld xmlns:a="http://schemas.openxmlformats.org/drawingml/2006/main" xmlns:r="http://schemas.openxmlformats.org/officeDocument/2006/relationships" xmlns:p="http://schemas.openxmlformats.org/presentationml/2006/main">
   <p:cSld>
     <p:spTree>
@@ -21675,8 +22182,8 @@
         </p:nvSpPr>
         <p:spPr>
           <a:xfrm>
-            <a:off x="8786943" y="4860146"/>
-            <a:ext cx="2566857" cy="646331"/>
+            <a:off x="8454801" y="4262986"/>
+            <a:ext cx="2898999" cy="646331"/>
           </a:xfrm>
           <a:prstGeom prst="rect">
             <a:avLst/>
@@ -21689,29 +22196,33 @@
           </a:ln>
         </p:spPr>
         <p:txBody>
-          <a:bodyPr wrap="none" rtlCol="0">
+          <a:bodyPr wrap="square" rtlCol="0">
             <a:spAutoFit/>
           </a:bodyPr>
           <a:lstStyle/>
           <a:p>
             <a:r>
               <a:rPr lang="en-BE" dirty="0"/>
-              <a:t>Python 2 countdown:</a:t>
-            </a:r>
-            <a:br>
-              <a:rPr lang="en-BE" dirty="0"/>
-            </a:br>
+              <a:t>Python 2 </a:t>
+            </a:r>
             <a:r>
               <a:rPr lang="en-US" dirty="0">
                 <a:hlinkClick r:id="rId2"/>
               </a:rPr>
-              <a:t>https://pythonclock.org/</a:t>
-            </a:r>
-            <a:r>
-              <a:rPr lang="en-BE" dirty="0"/>
-              <a:t> </a:t>
-            </a:r>
-            <a:endParaRPr lang="en-US" dirty="0"/>
+              <a:t>is not supported</a:t>
+            </a:r>
+            <a:r>
+              <a:rPr lang="en-US" dirty="0"/>
+              <a:t> as of 1</a:t>
+            </a:r>
+            <a:r>
+              <a:rPr lang="en-US" baseline="30000" dirty="0"/>
+              <a:t>st</a:t>
+            </a:r>
+            <a:r>
+              <a:rPr lang="en-US" dirty="0"/>
+              <a:t> January 2020.</a:t>
+            </a:r>
           </a:p>
         </p:txBody>
       </p:sp>
@@ -22189,7 +22700,7 @@
 </p:sld>
 </file>
 
-<file path=ppt/slides/slide42.xml><?xml version="1.0" encoding="utf-8"?>
+<file path=ppt/slides/slide43.xml><?xml version="1.0" encoding="utf-8"?>
 <p:sld xmlns:a="http://schemas.openxmlformats.org/drawingml/2006/main" xmlns:r="http://schemas.openxmlformats.org/officeDocument/2006/relationships" xmlns:p="http://schemas.openxmlformats.org/presentationml/2006/main" show="0">
   <p:cSld>
     <p:spTree>
@@ -22284,7 +22795,7 @@
 </p:sld>
 </file>
 
-<file path=ppt/slides/slide43.xml><?xml version="1.0" encoding="utf-8"?>
+<file path=ppt/slides/slide44.xml><?xml version="1.0" encoding="utf-8"?>
 <p:sld xmlns:a="http://schemas.openxmlformats.org/drawingml/2006/main" xmlns:r="http://schemas.openxmlformats.org/officeDocument/2006/relationships" xmlns:p="http://schemas.openxmlformats.org/presentationml/2006/main" show="0">
   <p:cSld>
     <p:spTree>
@@ -22637,18 +23148,24 @@
         </p:nvSpPr>
         <p:spPr>
           <a:xfrm>
-            <a:off x="838200" y="1690688"/>
-            <a:ext cx="10515600" cy="4351338"/>
+            <a:off x="838200" y="1455576"/>
+            <a:ext cx="10515600" cy="4586450"/>
           </a:xfrm>
         </p:spPr>
         <p:txBody>
           <a:bodyPr>
-            <a:normAutofit lnSpcReduction="10000"/>
+            <a:normAutofit fontScale="92500" lnSpcReduction="10000"/>
           </a:bodyPr>
           <a:lstStyle/>
           <a:p>
             <a:r>
               <a:rPr lang="en-US" dirty="0"/>
+              <a:t>Using bare-metal Python standard library</a:t>
+            </a:r>
+          </a:p>
+          <a:p>
+            <a:r>
+              <a:rPr lang="en-US" dirty="0"/>
               <a:t>Getting to know the very basics:</a:t>
             </a:r>
           </a:p>
@@ -22700,7 +23217,7 @@
             </a:r>
             <a:r>
               <a:rPr lang="nl-BE" dirty="0"/>
-              <a:t>, </a:t>
+              <a:t>? </a:t>
             </a:r>
             <a:r>
               <a:rPr lang="nl-BE" dirty="0" err="1"/>
@@ -22764,8 +23281,6 @@
               <a:rPr lang="en-US" sz="1400" i="1" dirty="0"/>
               <a:t>Taken from GJ Bex</a:t>
             </a:r>
-          </a:p>
-          <a:p>
             <a:endParaRPr lang="en-US" dirty="0">
               <a:solidFill>
                 <a:schemeClr val="bg1">
@@ -22867,15 +23382,33 @@
                                   </p:childTnLst>
                                 </p:cTn>
                               </p:par>
+                            </p:childTnLst>
+                          </p:cTn>
+                        </p:par>
+                      </p:childTnLst>
+                    </p:cTn>
+                  </p:par>
+                  <p:par>
+                    <p:cTn id="7" fill="hold">
+                      <p:stCondLst>
+                        <p:cond delay="indefinite"/>
+                      </p:stCondLst>
+                      <p:childTnLst>
+                        <p:par>
+                          <p:cTn id="8" fill="hold">
+                            <p:stCondLst>
+                              <p:cond delay="0"/>
+                            </p:stCondLst>
+                            <p:childTnLst>
                               <p:par>
-                                <p:cTn id="7" presetID="1" presetClass="entr" presetSubtype="0" fill="hold" grpId="0" nodeType="withEffect">
+                                <p:cTn id="9" presetID="1" presetClass="entr" presetSubtype="0" fill="hold" grpId="0" nodeType="clickEffect">
                                   <p:stCondLst>
                                     <p:cond delay="0"/>
                                   </p:stCondLst>
                                   <p:childTnLst>
                                     <p:set>
                                       <p:cBhvr>
-                                        <p:cTn id="8" dur="1" fill="hold">
+                                        <p:cTn id="10" dur="1" fill="hold">
                                           <p:stCondLst>
                                             <p:cond delay="0"/>
                                           </p:stCondLst>
@@ -22899,14 +23432,14 @@
                                 </p:cTn>
                               </p:par>
                               <p:par>
-                                <p:cTn id="9" presetID="1" presetClass="entr" presetSubtype="0" fill="hold" grpId="0" nodeType="withEffect">
+                                <p:cTn id="11" presetID="1" presetClass="entr" presetSubtype="0" fill="hold" grpId="0" nodeType="withEffect">
                                   <p:stCondLst>
                                     <p:cond delay="0"/>
                                   </p:stCondLst>
                                   <p:childTnLst>
                                     <p:set>
                                       <p:cBhvr>
-                                        <p:cTn id="10" dur="1" fill="hold">
+                                        <p:cTn id="12" dur="1" fill="hold">
                                           <p:stCondLst>
                                             <p:cond delay="0"/>
                                           </p:stCondLst>
@@ -22929,26 +23462,8 @@
                                   </p:childTnLst>
                                 </p:cTn>
                               </p:par>
-                            </p:childTnLst>
-                          </p:cTn>
-                        </p:par>
-                      </p:childTnLst>
-                    </p:cTn>
-                  </p:par>
-                  <p:par>
-                    <p:cTn id="11" fill="hold">
-                      <p:stCondLst>
-                        <p:cond delay="indefinite"/>
-                      </p:stCondLst>
-                      <p:childTnLst>
-                        <p:par>
-                          <p:cTn id="12" fill="hold">
-                            <p:stCondLst>
-                              <p:cond delay="0"/>
-                            </p:stCondLst>
-                            <p:childTnLst>
                               <p:par>
-                                <p:cTn id="13" presetID="1" presetClass="entr" presetSubtype="0" fill="hold" grpId="0" nodeType="clickEffect">
+                                <p:cTn id="13" presetID="1" presetClass="entr" presetSubtype="0" fill="hold" grpId="0" nodeType="withEffect">
                                   <p:stCondLst>
                                     <p:cond delay="0"/>
                                   </p:stCondLst>
@@ -22978,39 +23493,26 @@
                                   </p:childTnLst>
                                 </p:cTn>
                               </p:par>
+                            </p:childTnLst>
+                          </p:cTn>
+                        </p:par>
+                      </p:childTnLst>
+                    </p:cTn>
+                  </p:par>
+                  <p:par>
+                    <p:cTn id="15" fill="hold">
+                      <p:stCondLst>
+                        <p:cond delay="indefinite"/>
+                      </p:stCondLst>
+                      <p:childTnLst>
+                        <p:par>
+                          <p:cTn id="16" fill="hold">
+                            <p:stCondLst>
+                              <p:cond delay="0"/>
+                            </p:stCondLst>
+                            <p:childTnLst>
                               <p:par>
-                                <p:cTn id="15" presetID="1" presetClass="entr" presetSubtype="0" fill="hold" grpId="0" nodeType="withEffect">
-                                  <p:stCondLst>
-                                    <p:cond delay="0"/>
-                                  </p:stCondLst>
-                                  <p:childTnLst>
-                                    <p:set>
-                                      <p:cBhvr>
-                                        <p:cTn id="16" dur="1" fill="hold">
-                                          <p:stCondLst>
-                                            <p:cond delay="0"/>
-                                          </p:stCondLst>
-                                        </p:cTn>
-                                        <p:tgtEl>
-                                          <p:spTgt spid="3">
-                                            <p:txEl>
-                                              <p:pRg st="4" end="4"/>
-                                            </p:txEl>
-                                          </p:spTgt>
-                                        </p:tgtEl>
-                                        <p:attrNameLst>
-                                          <p:attrName>style.visibility</p:attrName>
-                                        </p:attrNameLst>
-                                      </p:cBhvr>
-                                      <p:to>
-                                        <p:strVal val="visible"/>
-                                      </p:to>
-                                    </p:set>
-                                  </p:childTnLst>
-                                </p:cTn>
-                              </p:par>
-                              <p:par>
-                                <p:cTn id="17" presetID="1" presetClass="entr" presetSubtype="0" fill="hold" grpId="0" nodeType="withEffect">
+                                <p:cTn id="17" presetID="1" presetClass="entr" presetSubtype="0" fill="hold" grpId="0" nodeType="clickEffect">
                                   <p:stCondLst>
                                     <p:cond delay="0"/>
                                   </p:stCondLst>
@@ -23025,7 +23527,7 @@
                                         <p:tgtEl>
                                           <p:spTgt spid="3">
                                             <p:txEl>
-                                              <p:pRg st="5" end="5"/>
+                                              <p:pRg st="4" end="4"/>
                                             </p:txEl>
                                           </p:spTgt>
                                         </p:tgtEl>
@@ -23056,7 +23558,69 @@
                                         <p:tgtEl>
                                           <p:spTgt spid="3">
                                             <p:txEl>
+                                              <p:pRg st="5" end="5"/>
+                                            </p:txEl>
+                                          </p:spTgt>
+                                        </p:tgtEl>
+                                        <p:attrNameLst>
+                                          <p:attrName>style.visibility</p:attrName>
+                                        </p:attrNameLst>
+                                      </p:cBhvr>
+                                      <p:to>
+                                        <p:strVal val="visible"/>
+                                      </p:to>
+                                    </p:set>
+                                  </p:childTnLst>
+                                </p:cTn>
+                              </p:par>
+                              <p:par>
+                                <p:cTn id="21" presetID="1" presetClass="entr" presetSubtype="0" fill="hold" grpId="0" nodeType="withEffect">
+                                  <p:stCondLst>
+                                    <p:cond delay="0"/>
+                                  </p:stCondLst>
+                                  <p:childTnLst>
+                                    <p:set>
+                                      <p:cBhvr>
+                                        <p:cTn id="22" dur="1" fill="hold">
+                                          <p:stCondLst>
+                                            <p:cond delay="0"/>
+                                          </p:stCondLst>
+                                        </p:cTn>
+                                        <p:tgtEl>
+                                          <p:spTgt spid="3">
+                                            <p:txEl>
                                               <p:pRg st="6" end="6"/>
+                                            </p:txEl>
+                                          </p:spTgt>
+                                        </p:tgtEl>
+                                        <p:attrNameLst>
+                                          <p:attrName>style.visibility</p:attrName>
+                                        </p:attrNameLst>
+                                      </p:cBhvr>
+                                      <p:to>
+                                        <p:strVal val="visible"/>
+                                      </p:to>
+                                    </p:set>
+                                  </p:childTnLst>
+                                </p:cTn>
+                              </p:par>
+                              <p:par>
+                                <p:cTn id="23" presetID="1" presetClass="entr" presetSubtype="0" fill="hold" grpId="0" nodeType="withEffect">
+                                  <p:stCondLst>
+                                    <p:cond delay="0"/>
+                                  </p:stCondLst>
+                                  <p:childTnLst>
+                                    <p:set>
+                                      <p:cBhvr>
+                                        <p:cTn id="24" dur="1" fill="hold">
+                                          <p:stCondLst>
+                                            <p:cond delay="0"/>
+                                          </p:stCondLst>
+                                        </p:cTn>
+                                        <p:tgtEl>
+                                          <p:spTgt spid="3">
+                                            <p:txEl>
+                                              <p:pRg st="7" end="7"/>
                                             </p:txEl>
                                           </p:spTgt>
                                         </p:tgtEl>
@@ -23078,26 +23642,26 @@
                     </p:cTn>
                   </p:par>
                   <p:par>
-                    <p:cTn id="21" fill="hold">
+                    <p:cTn id="25" fill="hold">
                       <p:stCondLst>
                         <p:cond delay="indefinite"/>
                       </p:stCondLst>
                       <p:childTnLst>
                         <p:par>
-                          <p:cTn id="22" fill="hold">
+                          <p:cTn id="26" fill="hold">
                             <p:stCondLst>
                               <p:cond delay="0"/>
                             </p:stCondLst>
                             <p:childTnLst>
                               <p:par>
-                                <p:cTn id="23" presetID="1" presetClass="entr" presetSubtype="0" fill="hold" grpId="0" nodeType="clickEffect">
+                                <p:cTn id="27" presetID="1" presetClass="entr" presetSubtype="0" fill="hold" grpId="0" nodeType="clickEffect">
                                   <p:stCondLst>
                                     <p:cond delay="0"/>
                                   </p:stCondLst>
                                   <p:childTnLst>
                                     <p:set>
                                       <p:cBhvr>
-                                        <p:cTn id="24" dur="1" fill="hold">
+                                        <p:cTn id="28" dur="1" fill="hold">
                                           <p:stCondLst>
                                             <p:cond delay="0"/>
                                           </p:stCondLst>
@@ -23105,7 +23669,7 @@
                                         <p:tgtEl>
                                           <p:spTgt spid="3">
                                             <p:txEl>
-                                              <p:pRg st="8" end="8"/>
+                                              <p:pRg st="9" end="9"/>
                                             </p:txEl>
                                           </p:spTgt>
                                         </p:tgtEl>
@@ -23227,7 +23791,15 @@
             <a:pPr lvl="1"/>
             <a:r>
               <a:rPr lang="en-US" dirty="0"/>
-              <a:t>prerequisites: none</a:t>
+              <a:t>prerequisites: IDE (e.g. PyCharm, Spyder, </a:t>
+            </a:r>
+            <a:r>
+              <a:rPr lang="en-US" dirty="0" err="1"/>
+              <a:t>VSCode</a:t>
+            </a:r>
+            <a:r>
+              <a:rPr lang="en-US" dirty="0"/>
+              <a:t>)</a:t>
             </a:r>
           </a:p>
           <a:p>
@@ -23263,7 +23835,15 @@
             <a:pPr lvl="1"/>
             <a:r>
               <a:rPr lang="en-US" dirty="0"/>
-              <a:t>prerequisites: none</a:t>
+              <a:t>prerequisites: IDE (e.g. PyCharm, Spyder, </a:t>
+            </a:r>
+            <a:r>
+              <a:rPr lang="en-US" dirty="0" err="1"/>
+              <a:t>VSCode</a:t>
+            </a:r>
+            <a:r>
+              <a:rPr lang="en-US" dirty="0"/>
+              <a:t>)</a:t>
             </a:r>
           </a:p>
           <a:p>
@@ -23378,7 +23958,7 @@
             <a:pPr lvl="1"/>
             <a:r>
               <a:rPr lang="en-US" dirty="0"/>
-              <a:t>Visual Studio Code (or one may choose Spyder)</a:t>
+              <a:t>Visual Studio Code (preferred)</a:t>
             </a:r>
           </a:p>
           <a:p>

--- a/slides-pptx/01-Python_intro_overview.pptx
+++ b/slides-pptx/01-Python_intro_overview.pptx
@@ -632,6 +632,29 @@
     </pc:docChg>
   </pc:docChgLst>
   <pc:docChgLst>
+    <pc:chgData name="Frank Van Puyvelde" userId="ba4190df-4674-45fe-be59-1502c3515486" providerId="ADAL" clId="{7F80BC0D-5411-433C-A6D2-DD5325DF1403}"/>
+    <pc:docChg chg="undo custSel modSld">
+      <pc:chgData name="Frank Van Puyvelde" userId="ba4190df-4674-45fe-be59-1502c3515486" providerId="ADAL" clId="{7F80BC0D-5411-433C-A6D2-DD5325DF1403}" dt="2024-06-25T09:22:05.349" v="283" actId="20577"/>
+      <pc:docMkLst>
+        <pc:docMk/>
+      </pc:docMkLst>
+      <pc:sldChg chg="modSp mod">
+        <pc:chgData name="Frank Van Puyvelde" userId="ba4190df-4674-45fe-be59-1502c3515486" providerId="ADAL" clId="{7F80BC0D-5411-433C-A6D2-DD5325DF1403}" dt="2024-06-25T09:22:05.349" v="283" actId="20577"/>
+        <pc:sldMkLst>
+          <pc:docMk/>
+          <pc:sldMk cId="1510136275" sldId="263"/>
+        </pc:sldMkLst>
+      </pc:sldChg>
+      <pc:sldChg chg="modSp mod">
+        <pc:chgData name="Frank Van Puyvelde" userId="ba4190df-4674-45fe-be59-1502c3515486" providerId="ADAL" clId="{7F80BC0D-5411-433C-A6D2-DD5325DF1403}" dt="2024-06-25T09:20:49.251" v="274" actId="20577"/>
+        <pc:sldMkLst>
+          <pc:docMk/>
+          <pc:sldMk cId="2137659803" sldId="824"/>
+        </pc:sldMkLst>
+      </pc:sldChg>
+    </pc:docChg>
+  </pc:docChgLst>
+  <pc:docChgLst>
     <pc:chgData name="Frank Van Puyvelde" userId="ba4190df-4674-45fe-be59-1502c3515486" providerId="ADAL" clId="{46A49013-7A0F-4944-916D-823DEEF8AD41}"/>
     <pc:docChg chg="custSel modSld">
       <pc:chgData name="Frank Van Puyvelde" userId="ba4190df-4674-45fe-be59-1502c3515486" providerId="ADAL" clId="{46A49013-7A0F-4944-916D-823DEEF8AD41}" dt="2023-02-07T10:51:36.518" v="6" actId="15"/>
@@ -650,29 +673,6 @@
         <pc:sldMkLst>
           <pc:docMk/>
           <pc:sldMk cId="1360806744" sldId="497"/>
-        </pc:sldMkLst>
-      </pc:sldChg>
-    </pc:docChg>
-  </pc:docChgLst>
-  <pc:docChgLst>
-    <pc:chgData name="Frank Van Puyvelde" userId="ba4190df-4674-45fe-be59-1502c3515486" providerId="ADAL" clId="{7F80BC0D-5411-433C-A6D2-DD5325DF1403}"/>
-    <pc:docChg chg="undo custSel modSld">
-      <pc:chgData name="Frank Van Puyvelde" userId="ba4190df-4674-45fe-be59-1502c3515486" providerId="ADAL" clId="{7F80BC0D-5411-433C-A6D2-DD5325DF1403}" dt="2024-06-25T09:22:05.349" v="283" actId="20577"/>
-      <pc:docMkLst>
-        <pc:docMk/>
-      </pc:docMkLst>
-      <pc:sldChg chg="modSp mod">
-        <pc:chgData name="Frank Van Puyvelde" userId="ba4190df-4674-45fe-be59-1502c3515486" providerId="ADAL" clId="{7F80BC0D-5411-433C-A6D2-DD5325DF1403}" dt="2024-06-25T09:22:05.349" v="283" actId="20577"/>
-        <pc:sldMkLst>
-          <pc:docMk/>
-          <pc:sldMk cId="1510136275" sldId="263"/>
-        </pc:sldMkLst>
-      </pc:sldChg>
-      <pc:sldChg chg="modSp mod">
-        <pc:chgData name="Frank Van Puyvelde" userId="ba4190df-4674-45fe-be59-1502c3515486" providerId="ADAL" clId="{7F80BC0D-5411-433C-A6D2-DD5325DF1403}" dt="2024-06-25T09:20:49.251" v="274" actId="20577"/>
-        <pc:sldMkLst>
-          <pc:docMk/>
-          <pc:sldMk cId="2137659803" sldId="824"/>
         </pc:sldMkLst>
       </pc:sldChg>
     </pc:docChg>
@@ -752,6 +752,22 @@
     </pc:docChg>
   </pc:docChgLst>
   <pc:docChgLst>
+    <pc:chgData name="Frank Van Puyvelde" userId="ba4190df-4674-45fe-be59-1502c3515486" providerId="ADAL" clId="{C650EDCE-629E-4C52-868E-EFBC5D8EFBCE}"/>
+    <pc:docChg chg="custSel addSld modSld modSection">
+      <pc:chgData name="Frank Van Puyvelde" userId="ba4190df-4674-45fe-be59-1502c3515486" providerId="ADAL" clId="{C650EDCE-629E-4C52-868E-EFBC5D8EFBCE}" dt="2024-05-24T13:57:34.865" v="465" actId="113"/>
+      <pc:docMkLst>
+        <pc:docMk/>
+      </pc:docMkLst>
+      <pc:sldChg chg="addSp delSp modSp new mod modClrScheme chgLayout">
+        <pc:chgData name="Frank Van Puyvelde" userId="ba4190df-4674-45fe-be59-1502c3515486" providerId="ADAL" clId="{C650EDCE-629E-4C52-868E-EFBC5D8EFBCE}" dt="2024-05-24T13:57:34.865" v="465" actId="113"/>
+        <pc:sldMkLst>
+          <pc:docMk/>
+          <pc:sldMk cId="2137659803" sldId="824"/>
+        </pc:sldMkLst>
+      </pc:sldChg>
+    </pc:docChg>
+  </pc:docChgLst>
+  <pc:docChgLst>
     <pc:chgData name="Frank Van Puyvelde" userId="ba4190df-4674-45fe-be59-1502c3515486" providerId="ADAL" clId="{6F65F12E-AA89-40A4-9666-EBF914E60322}"/>
     <pc:docChg chg="custSel addSld delSld modSld modSection">
       <pc:chgData name="Frank Van Puyvelde" userId="ba4190df-4674-45fe-be59-1502c3515486" providerId="ADAL" clId="{6F65F12E-AA89-40A4-9666-EBF914E60322}" dt="2024-01-22T14:46:20.625" v="348" actId="20577"/>
@@ -791,22 +807,6 @@
         <pc:sldMkLst>
           <pc:docMk/>
           <pc:sldMk cId="2928174840" sldId="823"/>
-        </pc:sldMkLst>
-      </pc:sldChg>
-    </pc:docChg>
-  </pc:docChgLst>
-  <pc:docChgLst>
-    <pc:chgData name="Frank Van Puyvelde" userId="ba4190df-4674-45fe-be59-1502c3515486" providerId="ADAL" clId="{C650EDCE-629E-4C52-868E-EFBC5D8EFBCE}"/>
-    <pc:docChg chg="custSel addSld modSld modSection">
-      <pc:chgData name="Frank Van Puyvelde" userId="ba4190df-4674-45fe-be59-1502c3515486" providerId="ADAL" clId="{C650EDCE-629E-4C52-868E-EFBC5D8EFBCE}" dt="2024-05-24T13:57:34.865" v="465" actId="113"/>
-      <pc:docMkLst>
-        <pc:docMk/>
-      </pc:docMkLst>
-      <pc:sldChg chg="addSp delSp modSp new mod modClrScheme chgLayout">
-        <pc:chgData name="Frank Van Puyvelde" userId="ba4190df-4674-45fe-be59-1502c3515486" providerId="ADAL" clId="{C650EDCE-629E-4C52-868E-EFBC5D8EFBCE}" dt="2024-05-24T13:57:34.865" v="465" actId="113"/>
-        <pc:sldMkLst>
-          <pc:docMk/>
-          <pc:sldMk cId="2137659803" sldId="824"/>
         </pc:sldMkLst>
       </pc:sldChg>
     </pc:docChg>
@@ -9486,7 +9486,7 @@
           <a:p>
             <a:fld id="{7C0C32E9-7654-402D-8E29-870B0AFB287F}" type="datetimeFigureOut">
               <a:rPr lang="nl-BE" smtClean="0"/>
-              <a:t>1/10/2026</a:t>
+              <a:t>5/10/2026</a:t>
             </a:fld>
             <a:endParaRPr lang="nl-BE"/>
           </a:p>
@@ -12023,7 +12023,7 @@
           <a:p>
             <a:fld id="{F4D79F2A-C2D7-4941-A36E-1F6A2F4B862D}" type="datetimeFigureOut">
               <a:rPr lang="nl-BE" smtClean="0"/>
-              <a:t>1/10/2026</a:t>
+              <a:t>5/10/2026</a:t>
             </a:fld>
             <a:endParaRPr lang="nl-BE"/>
           </a:p>
@@ -12203,7 +12203,7 @@
           <a:p>
             <a:fld id="{F4D79F2A-C2D7-4941-A36E-1F6A2F4B862D}" type="datetimeFigureOut">
               <a:rPr lang="nl-BE" smtClean="0"/>
-              <a:t>1/10/2026</a:t>
+              <a:t>5/10/2026</a:t>
             </a:fld>
             <a:endParaRPr lang="nl-BE"/>
           </a:p>
@@ -12831,7 +12831,7 @@
           <a:p>
             <a:fld id="{F4D79F2A-C2D7-4941-A36E-1F6A2F4B862D}" type="datetimeFigureOut">
               <a:rPr lang="nl-BE" smtClean="0"/>
-              <a:t>1/10/2026</a:t>
+              <a:t>5/10/2026</a:t>
             </a:fld>
             <a:endParaRPr lang="nl-BE"/>
           </a:p>
@@ -13077,7 +13077,7 @@
           <a:p>
             <a:fld id="{F4D79F2A-C2D7-4941-A36E-1F6A2F4B862D}" type="datetimeFigureOut">
               <a:rPr lang="nl-BE" smtClean="0"/>
-              <a:t>1/10/2026</a:t>
+              <a:t>5/10/2026</a:t>
             </a:fld>
             <a:endParaRPr lang="nl-BE"/>
           </a:p>
@@ -13309,7 +13309,7 @@
           <a:p>
             <a:fld id="{F4D79F2A-C2D7-4941-A36E-1F6A2F4B862D}" type="datetimeFigureOut">
               <a:rPr lang="nl-BE" smtClean="0"/>
-              <a:t>1/10/2026</a:t>
+              <a:t>5/10/2026</a:t>
             </a:fld>
             <a:endParaRPr lang="nl-BE"/>
           </a:p>
@@ -13676,7 +13676,7 @@
           <a:p>
             <a:fld id="{F4D79F2A-C2D7-4941-A36E-1F6A2F4B862D}" type="datetimeFigureOut">
               <a:rPr lang="nl-BE" smtClean="0"/>
-              <a:t>1/10/2026</a:t>
+              <a:t>5/10/2026</a:t>
             </a:fld>
             <a:endParaRPr lang="nl-BE"/>
           </a:p>
@@ -13794,7 +13794,7 @@
           <a:p>
             <a:fld id="{F4D79F2A-C2D7-4941-A36E-1F6A2F4B862D}" type="datetimeFigureOut">
               <a:rPr lang="nl-BE" smtClean="0"/>
-              <a:t>1/10/2026</a:t>
+              <a:t>5/10/2026</a:t>
             </a:fld>
             <a:endParaRPr lang="nl-BE"/>
           </a:p>
@@ -13889,7 +13889,7 @@
           <a:p>
             <a:fld id="{F4D79F2A-C2D7-4941-A36E-1F6A2F4B862D}" type="datetimeFigureOut">
               <a:rPr lang="nl-BE" smtClean="0"/>
-              <a:t>1/10/2026</a:t>
+              <a:t>5/10/2026</a:t>
             </a:fld>
             <a:endParaRPr lang="nl-BE"/>
           </a:p>
@@ -14166,7 +14166,7 @@
           <a:p>
             <a:fld id="{F4D79F2A-C2D7-4941-A36E-1F6A2F4B862D}" type="datetimeFigureOut">
               <a:rPr lang="nl-BE" smtClean="0"/>
-              <a:t>1/10/2026</a:t>
+              <a:t>5/10/2026</a:t>
             </a:fld>
             <a:endParaRPr lang="nl-BE"/>
           </a:p>
@@ -14419,7 +14419,7 @@
           <a:p>
             <a:fld id="{F4D79F2A-C2D7-4941-A36E-1F6A2F4B862D}" type="datetimeFigureOut">
               <a:rPr lang="nl-BE" smtClean="0"/>
-              <a:t>1/10/2026</a:t>
+              <a:t>5/10/2026</a:t>
             </a:fld>
             <a:endParaRPr lang="nl-BE"/>
           </a:p>
@@ -14632,7 +14632,7 @@
           <a:p>
             <a:fld id="{F4D79F2A-C2D7-4941-A36E-1F6A2F4B862D}" type="datetimeFigureOut">
               <a:rPr lang="nl-BE" smtClean="0"/>
-              <a:t>1/10/2026</a:t>
+              <a:t>5/10/2026</a:t>
             </a:fld>
             <a:endParaRPr lang="nl-BE"/>
           </a:p>

--- a/slides-pptx/01-Python_intro_overview.pptx
+++ b/slides-pptx/01-Python_intro_overview.pptx
@@ -632,6 +632,29 @@
     </pc:docChg>
   </pc:docChgLst>
   <pc:docChgLst>
+    <pc:chgData name="Frank Van Puyvelde" userId="ba4190df-4674-45fe-be59-1502c3515486" providerId="ADAL" clId="{46A49013-7A0F-4944-916D-823DEEF8AD41}"/>
+    <pc:docChg chg="custSel modSld">
+      <pc:chgData name="Frank Van Puyvelde" userId="ba4190df-4674-45fe-be59-1502c3515486" providerId="ADAL" clId="{46A49013-7A0F-4944-916D-823DEEF8AD41}" dt="2023-02-07T10:51:36.518" v="6" actId="15"/>
+      <pc:docMkLst>
+        <pc:docMk/>
+      </pc:docMkLst>
+      <pc:sldChg chg="modSp mod">
+        <pc:chgData name="Frank Van Puyvelde" userId="ba4190df-4674-45fe-be59-1502c3515486" providerId="ADAL" clId="{46A49013-7A0F-4944-916D-823DEEF8AD41}" dt="2023-02-07T10:51:36.518" v="6" actId="15"/>
+        <pc:sldMkLst>
+          <pc:docMk/>
+          <pc:sldMk cId="3778624420" sldId="259"/>
+        </pc:sldMkLst>
+      </pc:sldChg>
+      <pc:sldChg chg="modSp mod modAnim">
+        <pc:chgData name="Frank Van Puyvelde" userId="ba4190df-4674-45fe-be59-1502c3515486" providerId="ADAL" clId="{46A49013-7A0F-4944-916D-823DEEF8AD41}" dt="2023-02-07T10:50:41.762" v="5" actId="27636"/>
+        <pc:sldMkLst>
+          <pc:docMk/>
+          <pc:sldMk cId="1360806744" sldId="497"/>
+        </pc:sldMkLst>
+      </pc:sldChg>
+    </pc:docChg>
+  </pc:docChgLst>
+  <pc:docChgLst>
     <pc:chgData name="Frank Van Puyvelde" userId="ba4190df-4674-45fe-be59-1502c3515486" providerId="ADAL" clId="{7F80BC0D-5411-433C-A6D2-DD5325DF1403}"/>
     <pc:docChg chg="undo custSel modSld">
       <pc:chgData name="Frank Van Puyvelde" userId="ba4190df-4674-45fe-be59-1502c3515486" providerId="ADAL" clId="{7F80BC0D-5411-433C-A6D2-DD5325DF1403}" dt="2024-06-25T09:22:05.349" v="283" actId="20577"/>
@@ -650,29 +673,6 @@
         <pc:sldMkLst>
           <pc:docMk/>
           <pc:sldMk cId="2137659803" sldId="824"/>
-        </pc:sldMkLst>
-      </pc:sldChg>
-    </pc:docChg>
-  </pc:docChgLst>
-  <pc:docChgLst>
-    <pc:chgData name="Frank Van Puyvelde" userId="ba4190df-4674-45fe-be59-1502c3515486" providerId="ADAL" clId="{46A49013-7A0F-4944-916D-823DEEF8AD41}"/>
-    <pc:docChg chg="custSel modSld">
-      <pc:chgData name="Frank Van Puyvelde" userId="ba4190df-4674-45fe-be59-1502c3515486" providerId="ADAL" clId="{46A49013-7A0F-4944-916D-823DEEF8AD41}" dt="2023-02-07T10:51:36.518" v="6" actId="15"/>
-      <pc:docMkLst>
-        <pc:docMk/>
-      </pc:docMkLst>
-      <pc:sldChg chg="modSp mod">
-        <pc:chgData name="Frank Van Puyvelde" userId="ba4190df-4674-45fe-be59-1502c3515486" providerId="ADAL" clId="{46A49013-7A0F-4944-916D-823DEEF8AD41}" dt="2023-02-07T10:51:36.518" v="6" actId="15"/>
-        <pc:sldMkLst>
-          <pc:docMk/>
-          <pc:sldMk cId="3778624420" sldId="259"/>
-        </pc:sldMkLst>
-      </pc:sldChg>
-      <pc:sldChg chg="modSp mod modAnim">
-        <pc:chgData name="Frank Van Puyvelde" userId="ba4190df-4674-45fe-be59-1502c3515486" providerId="ADAL" clId="{46A49013-7A0F-4944-916D-823DEEF8AD41}" dt="2023-02-07T10:50:41.762" v="5" actId="27636"/>
-        <pc:sldMkLst>
-          <pc:docMk/>
-          <pc:sldMk cId="1360806744" sldId="497"/>
         </pc:sldMkLst>
       </pc:sldChg>
     </pc:docChg>
@@ -752,22 +752,6 @@
     </pc:docChg>
   </pc:docChgLst>
   <pc:docChgLst>
-    <pc:chgData name="Frank Van Puyvelde" userId="ba4190df-4674-45fe-be59-1502c3515486" providerId="ADAL" clId="{C650EDCE-629E-4C52-868E-EFBC5D8EFBCE}"/>
-    <pc:docChg chg="custSel addSld modSld modSection">
-      <pc:chgData name="Frank Van Puyvelde" userId="ba4190df-4674-45fe-be59-1502c3515486" providerId="ADAL" clId="{C650EDCE-629E-4C52-868E-EFBC5D8EFBCE}" dt="2024-05-24T13:57:34.865" v="465" actId="113"/>
-      <pc:docMkLst>
-        <pc:docMk/>
-      </pc:docMkLst>
-      <pc:sldChg chg="addSp delSp modSp new mod modClrScheme chgLayout">
-        <pc:chgData name="Frank Van Puyvelde" userId="ba4190df-4674-45fe-be59-1502c3515486" providerId="ADAL" clId="{C650EDCE-629E-4C52-868E-EFBC5D8EFBCE}" dt="2024-05-24T13:57:34.865" v="465" actId="113"/>
-        <pc:sldMkLst>
-          <pc:docMk/>
-          <pc:sldMk cId="2137659803" sldId="824"/>
-        </pc:sldMkLst>
-      </pc:sldChg>
-    </pc:docChg>
-  </pc:docChgLst>
-  <pc:docChgLst>
     <pc:chgData name="Frank Van Puyvelde" userId="ba4190df-4674-45fe-be59-1502c3515486" providerId="ADAL" clId="{6F65F12E-AA89-40A4-9666-EBF914E60322}"/>
     <pc:docChg chg="custSel addSld delSld modSld modSection">
       <pc:chgData name="Frank Van Puyvelde" userId="ba4190df-4674-45fe-be59-1502c3515486" providerId="ADAL" clId="{6F65F12E-AA89-40A4-9666-EBF914E60322}" dt="2024-01-22T14:46:20.625" v="348" actId="20577"/>
@@ -807,6 +791,22 @@
         <pc:sldMkLst>
           <pc:docMk/>
           <pc:sldMk cId="2928174840" sldId="823"/>
+        </pc:sldMkLst>
+      </pc:sldChg>
+    </pc:docChg>
+  </pc:docChgLst>
+  <pc:docChgLst>
+    <pc:chgData name="Frank Van Puyvelde" userId="ba4190df-4674-45fe-be59-1502c3515486" providerId="ADAL" clId="{C650EDCE-629E-4C52-868E-EFBC5D8EFBCE}"/>
+    <pc:docChg chg="custSel addSld modSld modSection">
+      <pc:chgData name="Frank Van Puyvelde" userId="ba4190df-4674-45fe-be59-1502c3515486" providerId="ADAL" clId="{C650EDCE-629E-4C52-868E-EFBC5D8EFBCE}" dt="2024-05-24T13:57:34.865" v="465" actId="113"/>
+      <pc:docMkLst>
+        <pc:docMk/>
+      </pc:docMkLst>
+      <pc:sldChg chg="addSp delSp modSp new mod modClrScheme chgLayout">
+        <pc:chgData name="Frank Van Puyvelde" userId="ba4190df-4674-45fe-be59-1502c3515486" providerId="ADAL" clId="{C650EDCE-629E-4C52-868E-EFBC5D8EFBCE}" dt="2024-05-24T13:57:34.865" v="465" actId="113"/>
+        <pc:sldMkLst>
+          <pc:docMk/>
+          <pc:sldMk cId="2137659803" sldId="824"/>
         </pc:sldMkLst>
       </pc:sldChg>
     </pc:docChg>
